--- a/20261005_サンクスLINE誘導のご提案.pptx
+++ b/20261005_サンクスLINE誘導のご提案.pptx
@@ -6,18 +6,18 @@
     <p:sldMasterId id="2147483687" r:id="rId2"/>
   </p:sldMasterIdLst>
   <p:notesMasterIdLst>
-    <p:notesMasterId r:id="rId26"/>
+    <p:notesMasterId r:id="rId7"/>
   </p:notesMasterIdLst>
   <p:handoutMasterIdLst>
-    <p:handoutMasterId r:id="rId27"/>
+    <p:handoutMasterId r:id="rId8"/>
   </p:handoutMasterIdLst>
   <p:sldIdLst>
-    <p:sldId id="3039" r:id="rId32"/>
-    <p:sldId id="3040" r:id="rId33"/>
-    <p:sldId id="3041" r:id="rId34"/>
-    <p:sldId id="3042" r:id="rId35"/>
+    <p:sldId id="3039" r:id="rId3"/>
+    <p:sldId id="3040" r:id="rId4"/>
+    <p:sldId id="3041" r:id="rId5"/>
+    <p:sldId id="3042" r:id="rId6"/>
   </p:sldIdLst>
-  <p:sldSz cx="12192119" cy="6858000" type="A4"/>
+  <p:sldSz cx="12192000" cy="6858000"/>
   <p:notesSz cx="6807200" cy="9939338"/>
   <p:defaultTextStyle>
     <a:defPPr>
@@ -2642,8 +2642,8 @@
 </p:sldMaster>
 </file>
 
-<file path=ppt/slides/slide24.xml><?xml version="1.0" encoding="utf-8"?>
-<p:sld xmlns:a="http://schemas.openxmlformats.org/drawingml/2006/main" xmlns:p="http://schemas.openxmlformats.org/presentationml/2006/main" xmlns:r="http://schemas.openxmlformats.org/officeDocument/2006/relationships">
+<file path=ppt/slides/slide1.xml><?xml version="1.0" encoding="utf-8"?>
+<p:sld xmlns:a="http://schemas.openxmlformats.org/drawingml/2006/main" xmlns:r="http://schemas.openxmlformats.org/officeDocument/2006/relationships" xmlns:p="http://schemas.openxmlformats.org/presentationml/2006/main">
   <p:cSld>
     <p:spTree>
       <p:nvGrpSpPr>
@@ -2651,7 +2651,14 @@
         <p:cNvGrpSpPr/>
         <p:nvPr/>
       </p:nvGrpSpPr>
-      <p:grpSpPr/>
+      <p:grpSpPr>
+        <a:xfrm>
+          <a:off x="0" y="0"/>
+          <a:ext cx="0" cy="0"/>
+          <a:chOff x="0" y="0"/>
+          <a:chExt cx="0" cy="0"/>
+        </a:xfrm>
+      </p:grpSpPr>
       <p:sp>
         <p:nvSpPr>
           <p:cNvPr id="3" name="TextBox 1"/>
@@ -2812,10 +2819,11 @@
           </a:fontRef>
         </p:style>
         <p:txBody>
-          <a:bodyPr rtlCol="0" anchor="ctr" wrap="square" lIns="72000" tIns="18000" rIns="72000" bIns="18000"/>
+          <a:bodyPr wrap="square" lIns="72000" tIns="18000" rIns="72000" bIns="18000" rtlCol="0" anchor="ctr"/>
           <a:lstStyle/>
           <a:p>
             <a:pPr algn="ctr"/>
+            <a:endParaRPr/>
           </a:p>
         </p:txBody>
       </p:sp>
@@ -2836,7 +2844,7 @@
           <a:noFill/>
         </p:spPr>
         <p:txBody>
-          <a:bodyPr wrap="square" anchor="ctr" lIns="36000" rIns="36000" tIns="18000" bIns="18000">
+          <a:bodyPr wrap="square" lIns="36000" tIns="18000" rIns="36000" bIns="18000" anchor="ctr">
             <a:spAutoFit/>
           </a:bodyPr>
           <a:lstStyle/>
@@ -2923,10 +2931,11 @@
           </a:fontRef>
         </p:style>
         <p:txBody>
-          <a:bodyPr rtlCol="0" anchor="ctr" wrap="square" lIns="72000" tIns="18000" rIns="72000" bIns="18000"/>
+          <a:bodyPr wrap="square" lIns="72000" tIns="18000" rIns="72000" bIns="18000" rtlCol="0" anchor="ctr"/>
           <a:lstStyle/>
           <a:p>
             <a:pPr algn="ctr"/>
+            <a:endParaRPr/>
           </a:p>
         </p:txBody>
       </p:sp>
@@ -2947,7 +2956,7 @@
           <a:noFill/>
         </p:spPr>
         <p:txBody>
-          <a:bodyPr wrap="square" anchor="ctr" lIns="36000" rIns="36000" tIns="18000" bIns="18000">
+          <a:bodyPr wrap="square" lIns="36000" tIns="18000" rIns="36000" bIns="18000" anchor="ctr">
             <a:spAutoFit/>
           </a:bodyPr>
           <a:lstStyle/>
@@ -3013,10 +3022,11 @@
           </a:fontRef>
         </p:style>
         <p:txBody>
-          <a:bodyPr rtlCol="0" anchor="ctr" wrap="square" lIns="72000" tIns="18000" rIns="72000" bIns="18000"/>
+          <a:bodyPr wrap="square" lIns="72000" tIns="18000" rIns="72000" bIns="18000" rtlCol="0" anchor="ctr"/>
           <a:lstStyle/>
           <a:p>
             <a:pPr algn="ctr"/>
+            <a:endParaRPr/>
           </a:p>
         </p:txBody>
       </p:sp>
@@ -3037,7 +3047,7 @@
           <a:noFill/>
         </p:spPr>
         <p:txBody>
-          <a:bodyPr wrap="square" anchor="ctr" lIns="36000" rIns="36000" tIns="18000" bIns="18000">
+          <a:bodyPr wrap="square" lIns="36000" tIns="18000" rIns="36000" bIns="18000" anchor="ctr">
             <a:spAutoFit/>
           </a:bodyPr>
           <a:lstStyle/>
@@ -3103,10 +3113,11 @@
           </a:fontRef>
         </p:style>
         <p:txBody>
-          <a:bodyPr rtlCol="0" anchor="ctr" wrap="square" lIns="72000" tIns="18000" rIns="72000" bIns="18000"/>
+          <a:bodyPr wrap="square" lIns="72000" tIns="18000" rIns="72000" bIns="18000" rtlCol="0" anchor="ctr"/>
           <a:lstStyle/>
           <a:p>
             <a:pPr algn="ctr"/>
+            <a:endParaRPr/>
           </a:p>
         </p:txBody>
       </p:sp>
@@ -3127,7 +3138,7 @@
           <a:noFill/>
         </p:spPr>
         <p:txBody>
-          <a:bodyPr wrap="square" anchor="ctr" lIns="36000" rIns="36000" tIns="18000" bIns="18000">
+          <a:bodyPr wrap="square" lIns="36000" tIns="18000" rIns="36000" bIns="18000" anchor="ctr">
             <a:spAutoFit/>
           </a:bodyPr>
           <a:lstStyle/>
@@ -3214,10 +3225,11 @@
           </a:fontRef>
         </p:style>
         <p:txBody>
-          <a:bodyPr rtlCol="0" anchor="ctr" wrap="square" lIns="72000" tIns="18000" rIns="72000" bIns="18000"/>
+          <a:bodyPr wrap="square" lIns="72000" tIns="18000" rIns="72000" bIns="18000" rtlCol="0" anchor="ctr"/>
           <a:lstStyle/>
           <a:p>
             <a:pPr algn="ctr"/>
+            <a:endParaRPr/>
           </a:p>
         </p:txBody>
       </p:sp>
@@ -3238,7 +3250,7 @@
           <a:noFill/>
         </p:spPr>
         <p:txBody>
-          <a:bodyPr wrap="square" anchor="ctr" lIns="36000" rIns="36000" tIns="18000" bIns="18000">
+          <a:bodyPr wrap="square" lIns="36000" tIns="18000" rIns="36000" bIns="18000" anchor="ctr">
             <a:spAutoFit/>
           </a:bodyPr>
           <a:lstStyle/>
@@ -3325,10 +3337,11 @@
           </a:fontRef>
         </p:style>
         <p:txBody>
-          <a:bodyPr rtlCol="0" anchor="ctr" wrap="square" lIns="72000" tIns="18000" rIns="72000" bIns="18000"/>
+          <a:bodyPr wrap="square" lIns="72000" tIns="18000" rIns="72000" bIns="18000" rtlCol="0" anchor="ctr"/>
           <a:lstStyle/>
           <a:p>
             <a:pPr algn="ctr"/>
+            <a:endParaRPr/>
           </a:p>
         </p:txBody>
       </p:sp>
@@ -3349,7 +3362,7 @@
           <a:noFill/>
         </p:spPr>
         <p:txBody>
-          <a:bodyPr wrap="square" anchor="ctr" lIns="36000" rIns="36000" tIns="18000" bIns="18000">
+          <a:bodyPr wrap="square" lIns="36000" tIns="18000" rIns="36000" bIns="18000" anchor="ctr">
             <a:spAutoFit/>
           </a:bodyPr>
           <a:lstStyle/>
@@ -3414,7 +3427,7 @@
           <a:noFill/>
         </p:spPr>
         <p:txBody>
-          <a:bodyPr wrap="square" anchor="t" lIns="36000" rIns="36000" tIns="18000" bIns="18000">
+          <a:bodyPr wrap="square" lIns="36000" tIns="18000" rIns="36000" bIns="18000" anchor="t">
             <a:spAutoFit/>
           </a:bodyPr>
           <a:lstStyle/>
@@ -3449,8 +3462,8 @@
         </p:nvSpPr>
         <p:spPr>
           <a:xfrm>
-            <a:off x="972000" y="3348000"/>
-            <a:ext cx="2988000" cy="864000"/>
+            <a:off x="576000" y="3849296"/>
+            <a:ext cx="2988000" cy="797408"/>
           </a:xfrm>
           <a:prstGeom prst="rect">
             <a:avLst/>
@@ -3458,7 +3471,7 @@
           <a:noFill/>
         </p:spPr>
         <p:txBody>
-          <a:bodyPr wrap="square" anchor="ctr" lIns="36000" rIns="36000" tIns="10800" bIns="10800">
+          <a:bodyPr wrap="square" lIns="36000" tIns="10800" rIns="36000" bIns="10800" anchor="ctr">
             <a:spAutoFit/>
           </a:bodyPr>
           <a:lstStyle/>
@@ -3472,7 +3485,7 @@
               </a:spcAft>
             </a:pPr>
             <a:r>
-              <a:rPr sz="4800" b="1">
+              <a:rPr lang="en-US" altLang="ja-JP" sz="1800" b="1" dirty="0">
                 <a:solidFill>
                   <a:srgbClr val="333333"/>
                 </a:solidFill>
@@ -3480,10 +3493,32 @@
                 <a:ea typeface="メイリオ"/>
                 <a:cs typeface="メイリオ"/>
               </a:rPr>
+              <a:t>CV</a:t>
+            </a:r>
+            <a:r>
+              <a:rPr lang="ja-JP" altLang="en-US" sz="1800" b="1" dirty="0">
+                <a:solidFill>
+                  <a:srgbClr val="333333"/>
+                </a:solidFill>
+                <a:latin typeface="メイリオ"/>
+                <a:ea typeface="メイリオ"/>
+                <a:cs typeface="メイリオ"/>
+              </a:rPr>
+              <a:t>：</a:t>
+            </a:r>
+            <a:r>
+              <a:rPr sz="4200" b="1" dirty="0">
+                <a:solidFill>
+                  <a:srgbClr val="333333"/>
+                </a:solidFill>
+                <a:latin typeface="メイリオ"/>
+                <a:ea typeface="メイリオ"/>
+                <a:cs typeface="メイリオ"/>
+              </a:rPr>
               <a:t>100</a:t>
             </a:r>
             <a:r>
-              <a:rPr sz="2000" b="1">
+              <a:rPr lang="ja-JP" altLang="en-US" sz="4200" b="1" dirty="0">
                 <a:solidFill>
                   <a:srgbClr val="333333"/>
                 </a:solidFill>
@@ -3491,8 +3526,16 @@
                 <a:ea typeface="メイリオ"/>
                 <a:cs typeface="メイリオ"/>
               </a:rPr>
-              <a:t>CV</a:t>
-            </a:r>
+              <a:t>件</a:t>
+            </a:r>
+            <a:endParaRPr sz="2000" b="1" dirty="0">
+              <a:solidFill>
+                <a:srgbClr val="333333"/>
+              </a:solidFill>
+              <a:latin typeface="メイリオ"/>
+              <a:ea typeface="メイリオ"/>
+              <a:cs typeface="メイリオ"/>
+            </a:endParaRPr>
           </a:p>
         </p:txBody>
       </p:sp>
@@ -3504,7 +3547,7 @@
         </p:nvSpPr>
         <p:spPr>
           <a:xfrm>
-            <a:off x="4608000" y="3348000"/>
+            <a:off x="4608000" y="3816000"/>
             <a:ext cx="2988000" cy="864000"/>
           </a:xfrm>
           <a:prstGeom prst="rect">
@@ -3513,7 +3556,7 @@
           <a:noFill/>
         </p:spPr>
         <p:txBody>
-          <a:bodyPr wrap="square" anchor="ctr" lIns="36000" rIns="36000" tIns="10800" bIns="10800">
+          <a:bodyPr wrap="square" lIns="36000" tIns="10800" rIns="36000" bIns="10800" anchor="ctr">
             <a:spAutoFit/>
           </a:bodyPr>
           <a:lstStyle/>
@@ -3527,7 +3570,7 @@
               </a:spcAft>
             </a:pPr>
             <a:r>
-              <a:rPr sz="4800" b="1">
+              <a:rPr sz="4200" b="1" dirty="0">
                 <a:solidFill>
                   <a:srgbClr val="1F285A"/>
                 </a:solidFill>
@@ -3538,7 +3581,7 @@
               <a:t>60</a:t>
             </a:r>
             <a:r>
-              <a:rPr sz="2000" b="1">
+              <a:rPr sz="1800" b="1" dirty="0">
                 <a:solidFill>
                   <a:srgbClr val="1F285A"/>
                 </a:solidFill>
@@ -3559,7 +3602,7 @@
         </p:nvSpPr>
         <p:spPr>
           <a:xfrm>
-            <a:off x="4608000" y="4176000"/>
+            <a:off x="4608000" y="4644000"/>
             <a:ext cx="2988000" cy="251999"/>
           </a:xfrm>
           <a:prstGeom prst="rect">
@@ -3568,7 +3611,7 @@
           <a:noFill/>
         </p:spPr>
         <p:txBody>
-          <a:bodyPr wrap="square" anchor="t" lIns="36000" rIns="36000" tIns="18000" bIns="18000">
+          <a:bodyPr wrap="square" lIns="36000" tIns="18000" rIns="36000" bIns="18000" anchor="t">
             <a:spAutoFit/>
           </a:bodyPr>
           <a:lstStyle/>
@@ -3603,7 +3646,7 @@
         </p:nvSpPr>
         <p:spPr>
           <a:xfrm>
-            <a:off x="8243999" y="3348000"/>
+            <a:off x="8243999" y="3816000"/>
             <a:ext cx="2988000" cy="864000"/>
           </a:xfrm>
           <a:prstGeom prst="rect">
@@ -3612,7 +3655,7 @@
           <a:noFill/>
         </p:spPr>
         <p:txBody>
-          <a:bodyPr wrap="square" anchor="ctr" lIns="36000" rIns="36000" tIns="10800" bIns="10800">
+          <a:bodyPr wrap="square" lIns="36000" tIns="10800" rIns="36000" bIns="10800" anchor="ctr">
             <a:spAutoFit/>
           </a:bodyPr>
           <a:lstStyle/>
@@ -3626,7 +3669,7 @@
               </a:spcAft>
             </a:pPr>
             <a:r>
-              <a:rPr sz="4800" b="1">
+              <a:rPr sz="4200" b="1">
                 <a:solidFill>
                   <a:srgbClr val="0B7A3B"/>
                 </a:solidFill>
@@ -3637,7 +3680,7 @@
               <a:t>30</a:t>
             </a:r>
             <a:r>
-              <a:rPr sz="2000" b="1">
+              <a:rPr sz="1800" b="1">
                 <a:solidFill>
                   <a:srgbClr val="0B7A3B"/>
                 </a:solidFill>
@@ -3658,7 +3701,7 @@
         </p:nvSpPr>
         <p:spPr>
           <a:xfrm>
-            <a:off x="8243999" y="4176000"/>
+            <a:off x="8243999" y="4644000"/>
             <a:ext cx="2988000" cy="251999"/>
           </a:xfrm>
           <a:prstGeom prst="rect">
@@ -3667,7 +3710,7 @@
           <a:noFill/>
         </p:spPr>
         <p:txBody>
-          <a:bodyPr wrap="square" anchor="t" lIns="36000" rIns="36000" tIns="18000" bIns="18000">
+          <a:bodyPr wrap="square" lIns="36000" tIns="18000" rIns="36000" bIns="18000" anchor="t">
             <a:spAutoFit/>
           </a:bodyPr>
           <a:lstStyle/>
@@ -3702,7 +3745,7 @@
         </p:nvCxnSpPr>
         <p:spPr>
           <a:xfrm>
-            <a:off x="3923999" y="3780000"/>
+            <a:off x="3923999" y="4248000"/>
             <a:ext cx="792001" cy="0"/>
           </a:xfrm>
           <a:prstGeom prst="line">
@@ -3738,7 +3781,7 @@
         </p:nvSpPr>
         <p:spPr>
           <a:xfrm>
-            <a:off x="3420000" y="3960000"/>
+            <a:off x="3420000" y="4428000"/>
             <a:ext cx="1800000" cy="251999"/>
           </a:xfrm>
           <a:prstGeom prst="rect">
@@ -3747,7 +3790,7 @@
           <a:noFill/>
         </p:spPr>
         <p:txBody>
-          <a:bodyPr wrap="square" anchor="t" lIns="36000" rIns="36000" tIns="18000" bIns="18000">
+          <a:bodyPr wrap="square" lIns="36000" tIns="18000" rIns="36000" bIns="18000" anchor="t">
             <a:spAutoFit/>
           </a:bodyPr>
           <a:lstStyle/>
@@ -3782,7 +3825,7 @@
         </p:nvCxnSpPr>
         <p:spPr>
           <a:xfrm>
-            <a:off x="7560000" y="3780000"/>
+            <a:off x="7560000" y="4248000"/>
             <a:ext cx="792000" cy="0"/>
           </a:xfrm>
           <a:prstGeom prst="line">
@@ -3818,7 +3861,7 @@
         </p:nvSpPr>
         <p:spPr>
           <a:xfrm>
-            <a:off x="7056000" y="3960000"/>
+            <a:off x="7056000" y="4428000"/>
             <a:ext cx="1800000" cy="251999"/>
           </a:xfrm>
           <a:prstGeom prst="rect">
@@ -3827,7 +3870,7 @@
           <a:noFill/>
         </p:spPr>
         <p:txBody>
-          <a:bodyPr wrap="square" anchor="t" lIns="36000" rIns="36000" tIns="18000" bIns="18000">
+          <a:bodyPr wrap="square" lIns="36000" tIns="18000" rIns="36000" bIns="18000" anchor="t">
             <a:spAutoFit/>
           </a:bodyPr>
           <a:lstStyle/>
@@ -3854,107 +3897,6 @@
           </a:p>
         </p:txBody>
       </p:sp>
-      <p:cxnSp>
-        <p:nvCxnSpPr>
-          <p:cNvPr id="28" name="Connector 27"/>
-          <p:cNvCxnSpPr/>
-          <p:nvPr/>
-        </p:nvCxnSpPr>
-        <p:spPr>
-          <a:xfrm>
-            <a:off x="792000" y="4824000"/>
-            <a:ext cx="10608119" cy="0"/>
-          </a:xfrm>
-          <a:prstGeom prst="line">
-            <a:avLst/>
-          </a:prstGeom>
-          <a:ln w="9525">
-            <a:solidFill>
-              <a:srgbClr val="D9D9D9"/>
-            </a:solidFill>
-          </a:ln>
-        </p:spPr>
-        <p:style>
-          <a:lnRef idx="2">
-            <a:schemeClr val="accent1"/>
-          </a:lnRef>
-          <a:fillRef idx="0">
-            <a:schemeClr val="accent1"/>
-          </a:fillRef>
-          <a:effectRef idx="0">
-            <a:schemeClr val="accent1"/>
-          </a:effectRef>
-          <a:fontRef idx="minor">
-            <a:schemeClr val="tx1"/>
-          </a:fontRef>
-        </p:style>
-      </p:cxnSp>
-      <p:sp>
-        <p:nvSpPr>
-          <p:cNvPr id="29" name="TextBox 28"/>
-          <p:cNvSpPr txBox="1"/>
-          <p:nvPr/>
-        </p:nvSpPr>
-        <p:spPr>
-          <a:xfrm>
-            <a:off x="792000" y="4932000"/>
-            <a:ext cx="10608119" cy="432000"/>
-          </a:xfrm>
-          <a:prstGeom prst="rect">
-            <a:avLst/>
-          </a:prstGeom>
-          <a:noFill/>
-        </p:spPr>
-        <p:txBody>
-          <a:bodyPr wrap="square" anchor="ctr" lIns="36000" rIns="36000" tIns="10800" bIns="10800">
-            <a:spAutoFit/>
-          </a:bodyPr>
-          <a:lstStyle/>
-          <a:p>
-            <a:pPr algn="ctr">
-              <a:lnSpc>
-                <a:spcPct val="105000"/>
-              </a:lnSpc>
-              <a:spcAft>
-                <a:spcPts val="200"/>
-              </a:spcAft>
-            </a:pPr>
-            <a:r>
-              <a:rPr sz="1500" b="1">
-                <a:solidFill>
-                  <a:srgbClr val="333333"/>
-                </a:solidFill>
-                <a:latin typeface="メイリオ"/>
-                <a:ea typeface="メイリオ"/>
-                <a:cs typeface="メイリオ"/>
-              </a:rPr>
-              <a:t>100CV</a:t>
-            </a:r>
-            <a:r>
-              <a:rPr sz="1400" b="0">
-                <a:solidFill>
-                  <a:srgbClr val="333333"/>
-                </a:solidFill>
-                <a:latin typeface="メイリオ"/>
-                <a:ea typeface="メイリオ"/>
-                <a:cs typeface="メイリオ"/>
-              </a:rPr>
-              <a:t>　×　誘導可能率60%　×　友だち追加率50%　＝　</a:t>
-            </a:r>
-            <a:r>
-              <a:rPr sz="1800" b="1">
-                <a:solidFill>
-                  <a:srgbClr val="0B7A3B"/>
-                </a:solidFill>
-                <a:latin typeface="メイリオ"/>
-                <a:ea typeface="メイリオ"/>
-                <a:cs typeface="メイリオ"/>
-              </a:rPr>
-              <a:t>30友だち</a:t>
-            </a:r>
-          </a:p>
-        </p:txBody>
-      </p:sp>
       <p:sp>
         <p:nvSpPr>
           <p:cNvPr id="30" name="TextBox 29"/>
@@ -3972,7 +3914,7 @@
           <a:noFill/>
         </p:spPr>
         <p:txBody>
-          <a:bodyPr wrap="square" anchor="t" lIns="36000" rIns="36000" tIns="18000" bIns="18000">
+          <a:bodyPr wrap="square" lIns="36000" tIns="18000" rIns="36000" bIns="18000" anchor="t">
             <a:spAutoFit/>
           </a:bodyPr>
           <a:lstStyle/>
@@ -4007,8 +3949,8 @@
 </p:sld>
 </file>
 
-<file path=ppt/slides/slide25.xml><?xml version="1.0" encoding="utf-8"?>
-<p:sld xmlns:a="http://schemas.openxmlformats.org/drawingml/2006/main" xmlns:p="http://schemas.openxmlformats.org/presentationml/2006/main" xmlns:r="http://schemas.openxmlformats.org/officeDocument/2006/relationships">
+<file path=ppt/slides/slide2.xml><?xml version="1.0" encoding="utf-8"?>
+<p:sld xmlns:a="http://schemas.openxmlformats.org/drawingml/2006/main" xmlns:r="http://schemas.openxmlformats.org/officeDocument/2006/relationships" xmlns:p="http://schemas.openxmlformats.org/presentationml/2006/main">
   <p:cSld>
     <p:spTree>
       <p:nvGrpSpPr>
@@ -4016,7 +3958,14 @@
         <p:cNvGrpSpPr/>
         <p:nvPr/>
       </p:nvGrpSpPr>
-      <p:grpSpPr/>
+      <p:grpSpPr>
+        <a:xfrm>
+          <a:off x="0" y="0"/>
+          <a:ext cx="0" cy="0"/>
+          <a:chOff x="0" y="0"/>
+          <a:chExt cx="0" cy="0"/>
+        </a:xfrm>
+      </p:grpSpPr>
       <p:sp>
         <p:nvSpPr>
           <p:cNvPr id="3" name="TextBox 1"/>
@@ -4090,7 +4039,7 @@
                 <a:ea typeface="メイリオ"/>
                 <a:cs typeface="メイリオ"/>
               </a:rPr>
-              <a:t>CV後をLINEでつなぐことで、来店・購入・成約まで届ける</a:t>
+              <a:t>CV後に接点がなければ、来店・購入の前に離脱が起きる</a:t>
             </a:r>
             <a:endParaRPr sz="1250" dirty="0">
               <a:solidFill>
@@ -4146,8 +4095,8 @@
         </p:nvSpPr>
         <p:spPr>
           <a:xfrm>
-            <a:off x="792000" y="1655999"/>
-            <a:ext cx="1655999" cy="792000"/>
+            <a:off x="792000" y="1944000"/>
+            <a:ext cx="1655999" cy="1080000"/>
           </a:xfrm>
           <a:prstGeom prst="rect">
             <a:avLst/>
@@ -4190,7 +4139,7 @@
               </a:spcAft>
             </a:pPr>
             <a:r>
-              <a:rPr sz="1600" b="1">
+              <a:rPr sz="1800" b="1">
                 <a:solidFill>
                   <a:srgbClr val="7F7F7F"/>
                 </a:solidFill>
@@ -4211,8 +4160,8 @@
         </p:nvSpPr>
         <p:spPr>
           <a:xfrm>
-            <a:off x="2556000" y="1692000"/>
-            <a:ext cx="2305529" cy="720000"/>
+            <a:off x="2556000" y="1944000"/>
+            <a:ext cx="2305500" cy="1080000"/>
           </a:xfrm>
           <a:prstGeom prst="homePlate">
             <a:avLst>
@@ -4257,8 +4206,8 @@
         </p:nvSpPr>
         <p:spPr>
           <a:xfrm>
-            <a:off x="2664000" y="1692000"/>
-            <a:ext cx="1981529" cy="720000"/>
+            <a:off x="2664000" y="1944000"/>
+            <a:ext cx="1981500" cy="1080000"/>
           </a:xfrm>
           <a:prstGeom prst="rect">
             <a:avLst/>
@@ -4280,7 +4229,7 @@
               </a:spcAft>
             </a:pPr>
             <a:r>
-              <a:rPr sz="1250" b="1">
+              <a:rPr sz="1400" b="1">
                 <a:solidFill>
                   <a:srgbClr val="333333"/>
                 </a:solidFill>
@@ -4301,8 +4250,8 @@
         </p:nvSpPr>
         <p:spPr>
           <a:xfrm>
-            <a:off x="4735529" y="1692000"/>
-            <a:ext cx="2305529" cy="720000"/>
+            <a:off x="4735500" y="1944000"/>
+            <a:ext cx="2305500" cy="1080000"/>
           </a:xfrm>
           <a:prstGeom prst="chevron">
             <a:avLst>
@@ -4347,8 +4296,8 @@
         </p:nvSpPr>
         <p:spPr>
           <a:xfrm>
-            <a:off x="4987529" y="1692000"/>
-            <a:ext cx="1837529" cy="720000"/>
+            <a:off x="4987500" y="1944000"/>
+            <a:ext cx="1837500" cy="1080000"/>
           </a:xfrm>
           <a:prstGeom prst="rect">
             <a:avLst/>
@@ -4370,7 +4319,7 @@
               </a:spcAft>
             </a:pPr>
             <a:r>
-              <a:rPr sz="1250" b="1">
+              <a:rPr sz="1400" b="1">
                 <a:solidFill>
                   <a:srgbClr val="333333"/>
                 </a:solidFill>
@@ -4391,7 +4340,7 @@
               </a:spcAft>
             </a:pPr>
             <a:r>
-              <a:rPr sz="1250" b="1">
+              <a:rPr sz="1400" b="1">
                 <a:solidFill>
                   <a:srgbClr val="333333"/>
                 </a:solidFill>
@@ -4412,8 +4361,8 @@
         </p:nvSpPr>
         <p:spPr>
           <a:xfrm>
-            <a:off x="6915059" y="1692000"/>
-            <a:ext cx="2305529" cy="720000"/>
+            <a:off x="6915000" y="1944000"/>
+            <a:ext cx="2305500" cy="1080000"/>
           </a:xfrm>
           <a:prstGeom prst="chevron">
             <a:avLst>
@@ -4458,8 +4407,8 @@
         </p:nvSpPr>
         <p:spPr>
           <a:xfrm>
-            <a:off x="7167059" y="1692000"/>
-            <a:ext cx="1837529" cy="720000"/>
+            <a:off x="7167000" y="1944000"/>
+            <a:ext cx="1837500" cy="1080000"/>
           </a:xfrm>
           <a:prstGeom prst="rect">
             <a:avLst/>
@@ -4481,7 +4430,7 @@
               </a:spcAft>
             </a:pPr>
             <a:r>
-              <a:rPr sz="1250" b="1">
+              <a:rPr sz="1400" b="1">
                 <a:solidFill>
                   <a:srgbClr val="333333"/>
                 </a:solidFill>
@@ -4489,7 +4438,28 @@
                 <a:ea typeface="メイリオ"/>
                 <a:cs typeface="メイリオ"/>
               </a:rPr>
-              <a:t>離脱</a:t>
+              <a:t>来店・購入</a:t>
+            </a:r>
+          </a:p>
+          <a:p>
+            <a:pPr algn="ctr">
+              <a:lnSpc>
+                <a:spcPct val="110000"/>
+              </a:lnSpc>
+              <a:spcAft>
+                <a:spcPts val="0"/>
+              </a:spcAft>
+            </a:pPr>
+            <a:r>
+              <a:rPr sz="1400" b="1">
+                <a:solidFill>
+                  <a:srgbClr val="333333"/>
+                </a:solidFill>
+                <a:latin typeface="メイリオ"/>
+                <a:ea typeface="メイリオ"/>
+                <a:cs typeface="メイリオ"/>
+              </a:rPr>
+              <a:t>の前に離脱</a:t>
             </a:r>
           </a:p>
         </p:txBody>
@@ -4502,8 +4472,8 @@
         </p:nvSpPr>
         <p:spPr>
           <a:xfrm>
-            <a:off x="9094589" y="1692000"/>
-            <a:ext cx="2305529" cy="720000"/>
+            <a:off x="9094500" y="1944000"/>
+            <a:ext cx="2305500" cy="1080000"/>
           </a:xfrm>
           <a:prstGeom prst="chevron">
             <a:avLst>
@@ -4548,8 +4518,8 @@
         </p:nvSpPr>
         <p:spPr>
           <a:xfrm>
-            <a:off x="9346589" y="1692000"/>
-            <a:ext cx="1837529" cy="720000"/>
+            <a:off x="9346500" y="1944000"/>
+            <a:ext cx="1837500" cy="1080000"/>
           </a:xfrm>
           <a:prstGeom prst="rect">
             <a:avLst/>
@@ -4571,7 +4541,7 @@
               </a:spcAft>
             </a:pPr>
             <a:r>
-              <a:rPr sz="1250" b="1">
+              <a:rPr sz="1400" b="1">
                 <a:solidFill>
                   <a:srgbClr val="7F7F7F"/>
                 </a:solidFill>
@@ -4579,7 +4549,7 @@
                 <a:ea typeface="メイリオ"/>
                 <a:cs typeface="メイリオ"/>
               </a:rPr>
-              <a:t>来店・購入に</a:t>
+              <a:t>売上に</a:t>
             </a:r>
           </a:p>
           <a:p>
@@ -4592,7 +4562,7 @@
               </a:spcAft>
             </a:pPr>
             <a:r>
-              <a:rPr sz="1250" b="1">
+              <a:rPr sz="1400" b="1">
                 <a:solidFill>
                   <a:srgbClr val="7F7F7F"/>
                 </a:solidFill>
@@ -4600,7 +4570,7 @@
                 <a:ea typeface="メイリオ"/>
                 <a:cs typeface="メイリオ"/>
               </a:rPr>
-              <a:t>つながらない</a:t>
+              <a:t>ならない</a:t>
             </a:r>
           </a:p>
         </p:txBody>
@@ -4613,8 +4583,8 @@
         </p:nvSpPr>
         <p:spPr>
           <a:xfrm>
-            <a:off x="792000" y="2736000"/>
-            <a:ext cx="1655999" cy="792000"/>
+            <a:off x="792000" y="3744000"/>
+            <a:ext cx="1655999" cy="1080000"/>
           </a:xfrm>
           <a:prstGeom prst="rect">
             <a:avLst/>
@@ -4638,7 +4608,7 @@
             <a:r>
               <a:rPr sz="1200" b="1">
                 <a:solidFill>
-                  <a:srgbClr val="1F285A"/>
+                  <a:srgbClr val="7F7F7F"/>
                 </a:solidFill>
                 <a:latin typeface="メイリオ"/>
                 <a:ea typeface="メイリオ"/>
@@ -4657,7 +4627,7 @@
               </a:spcAft>
             </a:pPr>
             <a:r>
-              <a:rPr sz="1600" b="1">
+              <a:rPr sz="1800" b="1">
                 <a:solidFill>
                   <a:srgbClr val="0B7A3B"/>
                 </a:solidFill>
@@ -4678,8 +4648,8 @@
         </p:nvSpPr>
         <p:spPr>
           <a:xfrm>
-            <a:off x="2556000" y="2772000"/>
-            <a:ext cx="1869623" cy="720000"/>
+            <a:off x="2556000" y="3744000"/>
+            <a:ext cx="2305500" cy="1080000"/>
           </a:xfrm>
           <a:prstGeom prst="homePlate">
             <a:avLst>
@@ -4724,8 +4694,8 @@
         </p:nvSpPr>
         <p:spPr>
           <a:xfrm>
-            <a:off x="2664000" y="2772000"/>
-            <a:ext cx="1545623" cy="720000"/>
+            <a:off x="2664000" y="3744000"/>
+            <a:ext cx="1981500" cy="1080000"/>
           </a:xfrm>
           <a:prstGeom prst="rect">
             <a:avLst/>
@@ -4747,7 +4717,7 @@
               </a:spcAft>
             </a:pPr>
             <a:r>
-              <a:rPr sz="1250" b="1">
+              <a:rPr sz="1400" b="1">
                 <a:solidFill>
                   <a:srgbClr val="1F285A"/>
                 </a:solidFill>
@@ -4768,8 +4738,8 @@
         </p:nvSpPr>
         <p:spPr>
           <a:xfrm>
-            <a:off x="4299623" y="2772000"/>
-            <a:ext cx="1869623" cy="720000"/>
+            <a:off x="4735500" y="3744000"/>
+            <a:ext cx="2305500" cy="1080000"/>
           </a:xfrm>
           <a:prstGeom prst="chevron">
             <a:avLst>
@@ -4814,8 +4784,8 @@
         </p:nvSpPr>
         <p:spPr>
           <a:xfrm>
-            <a:off x="4551623" y="2772000"/>
-            <a:ext cx="1401623" cy="720000"/>
+            <a:off x="4987500" y="3744000"/>
+            <a:ext cx="1837500" cy="1080000"/>
           </a:xfrm>
           <a:prstGeom prst="rect">
             <a:avLst/>
@@ -4837,7 +4807,7 @@
               </a:spcAft>
             </a:pPr>
             <a:r>
-              <a:rPr sz="1250" b="1">
+              <a:rPr sz="1400" b="1">
                 <a:solidFill>
                   <a:srgbClr val="FFFFFF"/>
                 </a:solidFill>
@@ -4845,7 +4815,7 @@
                 <a:ea typeface="メイリオ"/>
                 <a:cs typeface="メイリオ"/>
               </a:rPr>
-              <a:t>LINE</a:t>
+              <a:t>LINEで</a:t>
             </a:r>
           </a:p>
           <a:p>
@@ -4858,7 +4828,7 @@
               </a:spcAft>
             </a:pPr>
             <a:r>
-              <a:rPr sz="1250" b="1">
+              <a:rPr sz="1400" b="1">
                 <a:solidFill>
                   <a:srgbClr val="FFFFFF"/>
                 </a:solidFill>
@@ -4866,7 +4836,7 @@
                 <a:ea typeface="メイリオ"/>
                 <a:cs typeface="メイリオ"/>
               </a:rPr>
-              <a:t>友だち化</a:t>
+              <a:t>フォロー</a:t>
             </a:r>
           </a:p>
         </p:txBody>
@@ -4879,8 +4849,8 @@
         </p:nvSpPr>
         <p:spPr>
           <a:xfrm>
-            <a:off x="6043247" y="2772000"/>
-            <a:ext cx="1869623" cy="720000"/>
+            <a:off x="6915000" y="3744000"/>
+            <a:ext cx="2305500" cy="1080000"/>
           </a:xfrm>
           <a:prstGeom prst="chevron">
             <a:avLst>
@@ -4888,7 +4858,7 @@
             </a:avLst>
           </a:prstGeom>
           <a:solidFill>
-            <a:srgbClr val="E4E8F6"/>
+            <a:srgbClr val="1F285A"/>
           </a:solidFill>
           <a:ln>
             <a:noFill/>
@@ -4925,8 +4895,8 @@
         </p:nvSpPr>
         <p:spPr>
           <a:xfrm>
-            <a:off x="6295247" y="2772000"/>
-            <a:ext cx="1401623" cy="720000"/>
+            <a:off x="7167000" y="3744000"/>
+            <a:ext cx="1837500" cy="1080000"/>
           </a:xfrm>
           <a:prstGeom prst="rect">
             <a:avLst/>
@@ -4948,15 +4918,15 @@
               </a:spcAft>
             </a:pPr>
             <a:r>
-              <a:rPr sz="1250" b="1">
-                <a:solidFill>
-                  <a:srgbClr val="1F285A"/>
-                </a:solidFill>
-                <a:latin typeface="メイリオ"/>
-                <a:ea typeface="メイリオ"/>
-                <a:cs typeface="メイリオ"/>
-              </a:rPr>
-              <a:t>リマインド・</a:t>
+              <a:rPr sz="1400" b="1">
+                <a:solidFill>
+                  <a:srgbClr val="FFFFFF"/>
+                </a:solidFill>
+                <a:latin typeface="メイリオ"/>
+                <a:ea typeface="メイリオ"/>
+                <a:cs typeface="メイリオ"/>
+              </a:rPr>
+              <a:t>来店・購入</a:t>
             </a:r>
           </a:p>
           <a:p>
@@ -4969,15 +4939,15 @@
               </a:spcAft>
             </a:pPr>
             <a:r>
-              <a:rPr sz="1250" b="1">
-                <a:solidFill>
-                  <a:srgbClr val="1F285A"/>
-                </a:solidFill>
-                <a:latin typeface="メイリオ"/>
-                <a:ea typeface="メイリオ"/>
-                <a:cs typeface="メイリオ"/>
-              </a:rPr>
-              <a:t>フォロー</a:t>
+              <a:rPr sz="1400" b="1">
+                <a:solidFill>
+                  <a:srgbClr val="FFFFFF"/>
+                </a:solidFill>
+                <a:latin typeface="メイリオ"/>
+                <a:ea typeface="メイリオ"/>
+                <a:cs typeface="メイリオ"/>
+              </a:rPr>
+              <a:t>・成約</a:t>
             </a:r>
           </a:p>
         </p:txBody>
@@ -4990,8 +4960,8 @@
         </p:nvSpPr>
         <p:spPr>
           <a:xfrm>
-            <a:off x="7786871" y="2772000"/>
-            <a:ext cx="1869623" cy="720000"/>
+            <a:off x="9094500" y="3744000"/>
+            <a:ext cx="2305500" cy="1080000"/>
           </a:xfrm>
           <a:prstGeom prst="chevron">
             <a:avLst>
@@ -5036,8 +5006,8 @@
         </p:nvSpPr>
         <p:spPr>
           <a:xfrm>
-            <a:off x="8038871" y="2772000"/>
-            <a:ext cx="1401623" cy="720000"/>
+            <a:off x="9346500" y="3744000"/>
+            <a:ext cx="1837500" cy="1080000"/>
           </a:xfrm>
           <a:prstGeom prst="rect">
             <a:avLst/>
@@ -5059,7 +5029,7 @@
               </a:spcAft>
             </a:pPr>
             <a:r>
-              <a:rPr sz="1250" b="1">
+              <a:rPr sz="1400" b="1">
                 <a:solidFill>
                   <a:srgbClr val="FFFFFF"/>
                 </a:solidFill>
@@ -5067,7 +5037,7 @@
                 <a:ea typeface="メイリオ"/>
                 <a:cs typeface="メイリオ"/>
               </a:rPr>
-              <a:t>来店・購入</a:t>
+              <a:t>売上に</a:t>
             </a:r>
           </a:p>
           <a:p>
@@ -5080,7 +5050,7 @@
               </a:spcAft>
             </a:pPr>
             <a:r>
-              <a:rPr sz="1250" b="1">
+              <a:rPr sz="1400" b="1">
                 <a:solidFill>
                   <a:srgbClr val="FFFFFF"/>
                 </a:solidFill>
@@ -5088,176 +5058,21 @@
                 <a:ea typeface="メイリオ"/>
                 <a:cs typeface="メイリオ"/>
               </a:rPr>
-              <a:t>・成約</a:t>
-            </a:r>
-          </a:p>
-        </p:txBody>
-      </p:sp>
-      <p:sp>
-        <p:nvSpPr>
-          <p:cNvPr id="24" name="Chevron 23"/>
-          <p:cNvSpPr/>
-          <p:nvPr/>
-        </p:nvSpPr>
-        <p:spPr>
-          <a:xfrm>
-            <a:off x="9530495" y="2772000"/>
-            <a:ext cx="1869623" cy="720000"/>
-          </a:xfrm>
-          <a:prstGeom prst="chevron">
-            <a:avLst>
-              <a:gd name="adj" fmla="val 25000"/>
-            </a:avLst>
-          </a:prstGeom>
-          <a:solidFill>
-            <a:srgbClr val="1F285A"/>
-          </a:solidFill>
-          <a:ln>
-            <a:noFill/>
-          </a:ln>
-          <a:effectLst/>
-        </p:spPr>
-        <p:style>
-          <a:lnRef idx="1">
-            <a:schemeClr val="accent1"/>
-          </a:lnRef>
-          <a:fillRef idx="3">
-            <a:schemeClr val="accent1"/>
-          </a:fillRef>
-          <a:effectRef idx="0">
-            <a:schemeClr val="accent1"/>
-          </a:effectRef>
-          <a:fontRef idx="minor">
-            <a:schemeClr val="lt1"/>
-          </a:fontRef>
-        </p:style>
-        <p:txBody>
-          <a:bodyPr rtlCol="0" anchor="ctr" wrap="square" lIns="72000" tIns="18000" rIns="72000" bIns="18000"/>
-          <a:lstStyle/>
-          <a:p>
-            <a:pPr algn="ctr"/>
-          </a:p>
-        </p:txBody>
-      </p:sp>
-      <p:sp>
-        <p:nvSpPr>
-          <p:cNvPr id="25" name="TextBox 24"/>
-          <p:cNvSpPr txBox="1"/>
-          <p:nvPr/>
-        </p:nvSpPr>
-        <p:spPr>
-          <a:xfrm>
-            <a:off x="9782495" y="2772000"/>
-            <a:ext cx="1401623" cy="720000"/>
-          </a:xfrm>
-          <a:prstGeom prst="rect">
-            <a:avLst/>
-          </a:prstGeom>
-          <a:noFill/>
-        </p:spPr>
-        <p:txBody>
-          <a:bodyPr wrap="square" anchor="ctr" lIns="36000" rIns="36000" tIns="18000" bIns="18000">
-            <a:spAutoFit/>
-          </a:bodyPr>
-          <a:lstStyle/>
-          <a:p>
-            <a:pPr algn="ctr">
-              <a:lnSpc>
-                <a:spcPct val="110000"/>
-              </a:lnSpc>
-              <a:spcAft>
-                <a:spcPts val="0"/>
-              </a:spcAft>
-            </a:pPr>
-            <a:r>
-              <a:rPr sz="1250" b="1">
-                <a:solidFill>
-                  <a:srgbClr val="FFFFFF"/>
-                </a:solidFill>
-                <a:latin typeface="メイリオ"/>
-                <a:ea typeface="メイリオ"/>
-                <a:cs typeface="メイリオ"/>
-              </a:rPr>
-              <a:t>再来店・</a:t>
-            </a:r>
-          </a:p>
-          <a:p>
-            <a:pPr algn="ctr">
-              <a:lnSpc>
-                <a:spcPct val="110000"/>
-              </a:lnSpc>
-              <a:spcAft>
-                <a:spcPts val="0"/>
-              </a:spcAft>
-            </a:pPr>
-            <a:r>
-              <a:rPr sz="1250" b="1">
-                <a:solidFill>
-                  <a:srgbClr val="FFFFFF"/>
-                </a:solidFill>
-                <a:latin typeface="メイリオ"/>
-                <a:ea typeface="メイリオ"/>
-                <a:cs typeface="メイリオ"/>
-              </a:rPr>
-              <a:t>再購入</a:t>
-            </a:r>
-          </a:p>
-        </p:txBody>
-      </p:sp>
-      <p:sp>
-        <p:nvSpPr>
-          <p:cNvPr id="26" name="TextBox 25"/>
-          <p:cNvSpPr txBox="1"/>
-          <p:nvPr/>
-        </p:nvSpPr>
-        <p:spPr>
-          <a:xfrm>
-            <a:off x="2556000" y="3600000"/>
-            <a:ext cx="8844119" cy="251999"/>
-          </a:xfrm>
-          <a:prstGeom prst="rect">
-            <a:avLst/>
-          </a:prstGeom>
-          <a:noFill/>
-        </p:spPr>
-        <p:txBody>
-          <a:bodyPr wrap="square" anchor="t" lIns="36000" rIns="36000" tIns="18000" bIns="18000">
-            <a:spAutoFit/>
-          </a:bodyPr>
-          <a:lstStyle/>
-          <a:p>
-            <a:pPr algn="l">
-              <a:lnSpc>
-                <a:spcPct val="110000"/>
-              </a:lnSpc>
-              <a:spcAft>
-                <a:spcPts val="0"/>
-              </a:spcAft>
-            </a:pPr>
-            <a:r>
-              <a:rPr sz="1100" b="0">
-                <a:solidFill>
-                  <a:srgbClr val="333333"/>
-                </a:solidFill>
-                <a:latin typeface="メイリオ"/>
-                <a:ea typeface="メイリオ"/>
-                <a:cs typeface="メイリオ"/>
-              </a:rPr>
-              <a:t>例：100CVのうち30人をLINE友だち化できれば、その30人と継続して接点を持てる（想定）</a:t>
+              <a:t>なる</a:t>
             </a:r>
           </a:p>
         </p:txBody>
       </p:sp>
       <p:cxnSp>
         <p:nvCxnSpPr>
-          <p:cNvPr id="27" name="Connector 26"/>
+          <p:cNvPr id="24" name="Connector 23"/>
           <p:cNvCxnSpPr/>
           <p:nvPr/>
         </p:nvCxnSpPr>
         <p:spPr>
           <a:xfrm>
-            <a:off x="792000" y="4031999"/>
-            <a:ext cx="10608119" cy="0"/>
+            <a:off x="792000" y="3294000"/>
+            <a:ext cx="10608000" cy="0"/>
           </a:xfrm>
           <a:prstGeom prst="line">
             <a:avLst/>
@@ -5283,447 +5098,6 @@
           </a:fontRef>
         </p:style>
       </p:cxnSp>
-      <p:sp>
-        <p:nvSpPr>
-          <p:cNvPr id="28" name="Rectangle 27"/>
-          <p:cNvSpPr/>
-          <p:nvPr/>
-        </p:nvSpPr>
-        <p:spPr>
-          <a:xfrm>
-            <a:off x="1008000" y="4248000"/>
-            <a:ext cx="720000" cy="50400"/>
-          </a:xfrm>
-          <a:prstGeom prst="rect">
-            <a:avLst/>
-          </a:prstGeom>
-          <a:solidFill>
-            <a:srgbClr val="1F285A"/>
-          </a:solidFill>
-          <a:ln>
-            <a:noFill/>
-          </a:ln>
-          <a:effectLst/>
-        </p:spPr>
-        <p:style>
-          <a:lnRef idx="1">
-            <a:schemeClr val="accent1"/>
-          </a:lnRef>
-          <a:fillRef idx="3">
-            <a:schemeClr val="accent1"/>
-          </a:fillRef>
-          <a:effectRef idx="0">
-            <a:schemeClr val="accent1"/>
-          </a:effectRef>
-          <a:fontRef idx="minor">
-            <a:schemeClr val="lt1"/>
-          </a:fontRef>
-        </p:style>
-        <p:txBody>
-          <a:bodyPr rtlCol="0" anchor="ctr" wrap="square" lIns="72000" tIns="18000" rIns="72000" bIns="18000"/>
-          <a:lstStyle/>
-          <a:p>
-            <a:pPr algn="ctr"/>
-          </a:p>
-        </p:txBody>
-      </p:sp>
-      <p:sp>
-        <p:nvSpPr>
-          <p:cNvPr id="29" name="TextBox 28"/>
-          <p:cNvSpPr txBox="1"/>
-          <p:nvPr/>
-        </p:nvSpPr>
-        <p:spPr>
-          <a:xfrm>
-            <a:off x="972000" y="4374000"/>
-            <a:ext cx="3176039" cy="1224000"/>
-          </a:xfrm>
-          <a:prstGeom prst="rect">
-            <a:avLst/>
-          </a:prstGeom>
-          <a:noFill/>
-        </p:spPr>
-        <p:txBody>
-          <a:bodyPr wrap="square" anchor="t" lIns="36000" rIns="36000" tIns="18000" bIns="18000">
-            <a:spAutoFit/>
-          </a:bodyPr>
-          <a:lstStyle/>
-          <a:p>
-            <a:pPr algn="l">
-              <a:lnSpc>
-                <a:spcPct val="110000"/>
-              </a:lnSpc>
-              <a:spcAft>
-                <a:spcPts val="600"/>
-              </a:spcAft>
-            </a:pPr>
-            <a:r>
-              <a:rPr sz="1700" b="1">
-                <a:solidFill>
-                  <a:srgbClr val="1F285A"/>
-                </a:solidFill>
-                <a:latin typeface="メイリオ"/>
-                <a:ea typeface="メイリオ"/>
-                <a:cs typeface="メイリオ"/>
-              </a:rPr>
-              <a:t>実売上化</a:t>
-            </a:r>
-          </a:p>
-          <a:p>
-            <a:pPr algn="l">
-              <a:lnSpc>
-                <a:spcPct val="110000"/>
-              </a:lnSpc>
-              <a:spcAft>
-                <a:spcPts val="0"/>
-              </a:spcAft>
-            </a:pPr>
-            <a:r>
-              <a:rPr sz="1200" b="0">
-                <a:solidFill>
-                  <a:srgbClr val="333333"/>
-                </a:solidFill>
-                <a:latin typeface="メイリオ"/>
-                <a:ea typeface="メイリオ"/>
-                <a:cs typeface="メイリオ"/>
-              </a:rPr>
-              <a:t>CV後の離脱を防ぎ、来店・購入へ</a:t>
-            </a:r>
-          </a:p>
-        </p:txBody>
-      </p:sp>
-      <p:cxnSp>
-        <p:nvCxnSpPr>
-          <p:cNvPr id="30" name="Connector 29"/>
-          <p:cNvCxnSpPr/>
-          <p:nvPr/>
-        </p:nvCxnSpPr>
-        <p:spPr>
-          <a:xfrm>
-            <a:off x="4328039" y="4212000"/>
-            <a:ext cx="0" cy="1404000"/>
-          </a:xfrm>
-          <a:prstGeom prst="line">
-            <a:avLst/>
-          </a:prstGeom>
-          <a:ln w="9525">
-            <a:solidFill>
-              <a:srgbClr val="D9D9D9"/>
-            </a:solidFill>
-          </a:ln>
-        </p:spPr>
-        <p:style>
-          <a:lnRef idx="2">
-            <a:schemeClr val="accent1"/>
-          </a:lnRef>
-          <a:fillRef idx="0">
-            <a:schemeClr val="accent1"/>
-          </a:fillRef>
-          <a:effectRef idx="0">
-            <a:schemeClr val="accent1"/>
-          </a:effectRef>
-          <a:fontRef idx="minor">
-            <a:schemeClr val="tx1"/>
-          </a:fontRef>
-        </p:style>
-      </p:cxnSp>
-      <p:sp>
-        <p:nvSpPr>
-          <p:cNvPr id="31" name="Rectangle 30"/>
-          <p:cNvSpPr/>
-          <p:nvPr/>
-        </p:nvSpPr>
-        <p:spPr>
-          <a:xfrm>
-            <a:off x="4544039" y="4248000"/>
-            <a:ext cx="720000" cy="50400"/>
-          </a:xfrm>
-          <a:prstGeom prst="rect">
-            <a:avLst/>
-          </a:prstGeom>
-          <a:solidFill>
-            <a:srgbClr val="06C755"/>
-          </a:solidFill>
-          <a:ln>
-            <a:noFill/>
-          </a:ln>
-          <a:effectLst/>
-        </p:spPr>
-        <p:style>
-          <a:lnRef idx="1">
-            <a:schemeClr val="accent1"/>
-          </a:lnRef>
-          <a:fillRef idx="3">
-            <a:schemeClr val="accent1"/>
-          </a:fillRef>
-          <a:effectRef idx="0">
-            <a:schemeClr val="accent1"/>
-          </a:effectRef>
-          <a:fontRef idx="minor">
-            <a:schemeClr val="lt1"/>
-          </a:fontRef>
-        </p:style>
-        <p:txBody>
-          <a:bodyPr rtlCol="0" anchor="ctr" wrap="square" lIns="72000" tIns="18000" rIns="72000" bIns="18000"/>
-          <a:lstStyle/>
-          <a:p>
-            <a:pPr algn="ctr"/>
-          </a:p>
-        </p:txBody>
-      </p:sp>
-      <p:sp>
-        <p:nvSpPr>
-          <p:cNvPr id="32" name="TextBox 31"/>
-          <p:cNvSpPr txBox="1"/>
-          <p:nvPr/>
-        </p:nvSpPr>
-        <p:spPr>
-          <a:xfrm>
-            <a:off x="4508039" y="4374000"/>
-            <a:ext cx="3176039" cy="1224000"/>
-          </a:xfrm>
-          <a:prstGeom prst="rect">
-            <a:avLst/>
-          </a:prstGeom>
-          <a:noFill/>
-        </p:spPr>
-        <p:txBody>
-          <a:bodyPr wrap="square" anchor="t" lIns="36000" rIns="36000" tIns="18000" bIns="18000">
-            <a:spAutoFit/>
-          </a:bodyPr>
-          <a:lstStyle/>
-          <a:p>
-            <a:pPr algn="l">
-              <a:lnSpc>
-                <a:spcPct val="110000"/>
-              </a:lnSpc>
-              <a:spcAft>
-                <a:spcPts val="600"/>
-              </a:spcAft>
-            </a:pPr>
-            <a:r>
-              <a:rPr sz="1700" b="1">
-                <a:solidFill>
-                  <a:srgbClr val="1F285A"/>
-                </a:solidFill>
-                <a:latin typeface="メイリオ"/>
-                <a:ea typeface="メイリオ"/>
-                <a:cs typeface="メイリオ"/>
-              </a:rPr>
-              <a:t>顧客ストック化</a:t>
-            </a:r>
-          </a:p>
-          <a:p>
-            <a:pPr algn="l">
-              <a:lnSpc>
-                <a:spcPct val="110000"/>
-              </a:lnSpc>
-              <a:spcAft>
-                <a:spcPts val="0"/>
-              </a:spcAft>
-            </a:pPr>
-            <a:r>
-              <a:rPr sz="1200" b="0">
-                <a:solidFill>
-                  <a:srgbClr val="333333"/>
-                </a:solidFill>
-                <a:latin typeface="メイリオ"/>
-                <a:ea typeface="メイリオ"/>
-                <a:cs typeface="メイリオ"/>
-              </a:rPr>
-              <a:t>獲得したCVを、LINE上の接点として蓄積</a:t>
-            </a:r>
-          </a:p>
-        </p:txBody>
-      </p:sp>
-      <p:cxnSp>
-        <p:nvCxnSpPr>
-          <p:cNvPr id="33" name="Connector 32"/>
-          <p:cNvCxnSpPr/>
-          <p:nvPr/>
-        </p:nvCxnSpPr>
-        <p:spPr>
-          <a:xfrm>
-            <a:off x="7864079" y="4212000"/>
-            <a:ext cx="0" cy="1404000"/>
-          </a:xfrm>
-          <a:prstGeom prst="line">
-            <a:avLst/>
-          </a:prstGeom>
-          <a:ln w="9525">
-            <a:solidFill>
-              <a:srgbClr val="D9D9D9"/>
-            </a:solidFill>
-          </a:ln>
-        </p:spPr>
-        <p:style>
-          <a:lnRef idx="2">
-            <a:schemeClr val="accent1"/>
-          </a:lnRef>
-          <a:fillRef idx="0">
-            <a:schemeClr val="accent1"/>
-          </a:fillRef>
-          <a:effectRef idx="0">
-            <a:schemeClr val="accent1"/>
-          </a:effectRef>
-          <a:fontRef idx="minor">
-            <a:schemeClr val="tx1"/>
-          </a:fontRef>
-        </p:style>
-      </p:cxnSp>
-      <p:sp>
-        <p:nvSpPr>
-          <p:cNvPr id="34" name="Rectangle 33"/>
-          <p:cNvSpPr/>
-          <p:nvPr/>
-        </p:nvSpPr>
-        <p:spPr>
-          <a:xfrm>
-            <a:off x="8080079" y="4248000"/>
-            <a:ext cx="720000" cy="50400"/>
-          </a:xfrm>
-          <a:prstGeom prst="rect">
-            <a:avLst/>
-          </a:prstGeom>
-          <a:solidFill>
-            <a:srgbClr val="1F285A"/>
-          </a:solidFill>
-          <a:ln>
-            <a:noFill/>
-          </a:ln>
-          <a:effectLst/>
-        </p:spPr>
-        <p:style>
-          <a:lnRef idx="1">
-            <a:schemeClr val="accent1"/>
-          </a:lnRef>
-          <a:fillRef idx="3">
-            <a:schemeClr val="accent1"/>
-          </a:fillRef>
-          <a:effectRef idx="0">
-            <a:schemeClr val="accent1"/>
-          </a:effectRef>
-          <a:fontRef idx="minor">
-            <a:schemeClr val="lt1"/>
-          </a:fontRef>
-        </p:style>
-        <p:txBody>
-          <a:bodyPr rtlCol="0" anchor="ctr" wrap="square" lIns="72000" tIns="18000" rIns="72000" bIns="18000"/>
-          <a:lstStyle/>
-          <a:p>
-            <a:pPr algn="ctr"/>
-          </a:p>
-        </p:txBody>
-      </p:sp>
-      <p:sp>
-        <p:nvSpPr>
-          <p:cNvPr id="35" name="TextBox 34"/>
-          <p:cNvSpPr txBox="1"/>
-          <p:nvPr/>
-        </p:nvSpPr>
-        <p:spPr>
-          <a:xfrm>
-            <a:off x="8044079" y="4374000"/>
-            <a:ext cx="3176039" cy="1224000"/>
-          </a:xfrm>
-          <a:prstGeom prst="rect">
-            <a:avLst/>
-          </a:prstGeom>
-          <a:noFill/>
-        </p:spPr>
-        <p:txBody>
-          <a:bodyPr wrap="square" anchor="t" lIns="36000" rIns="36000" tIns="18000" bIns="18000">
-            <a:spAutoFit/>
-          </a:bodyPr>
-          <a:lstStyle/>
-          <a:p>
-            <a:pPr algn="l">
-              <a:lnSpc>
-                <a:spcPct val="110000"/>
-              </a:lnSpc>
-              <a:spcAft>
-                <a:spcPts val="600"/>
-              </a:spcAft>
-            </a:pPr>
-            <a:r>
-              <a:rPr sz="1700" b="1">
-                <a:solidFill>
-                  <a:srgbClr val="1F285A"/>
-                </a:solidFill>
-                <a:latin typeface="メイリオ"/>
-                <a:ea typeface="メイリオ"/>
-                <a:cs typeface="メイリオ"/>
-              </a:rPr>
-              <a:t>LTV向上</a:t>
-            </a:r>
-          </a:p>
-          <a:p>
-            <a:pPr algn="l">
-              <a:lnSpc>
-                <a:spcPct val="110000"/>
-              </a:lnSpc>
-              <a:spcAft>
-                <a:spcPts val="0"/>
-              </a:spcAft>
-            </a:pPr>
-            <a:r>
-              <a:rPr sz="1200" b="0">
-                <a:solidFill>
-                  <a:srgbClr val="333333"/>
-                </a:solidFill>
-                <a:latin typeface="メイリオ"/>
-                <a:ea typeface="メイリオ"/>
-                <a:cs typeface="メイリオ"/>
-              </a:rPr>
-              <a:t>継続フォローで、再来店・再購入へ</a:t>
-            </a:r>
-          </a:p>
-        </p:txBody>
-      </p:sp>
-      <p:sp>
-        <p:nvSpPr>
-          <p:cNvPr id="36" name="TextBox 35"/>
-          <p:cNvSpPr txBox="1"/>
-          <p:nvPr/>
-        </p:nvSpPr>
-        <p:spPr>
-          <a:xfrm>
-            <a:off x="792000" y="6192000"/>
-            <a:ext cx="10608119" cy="216000"/>
-          </a:xfrm>
-          <a:prstGeom prst="rect">
-            <a:avLst/>
-          </a:prstGeom>
-          <a:noFill/>
-        </p:spPr>
-        <p:txBody>
-          <a:bodyPr wrap="square" anchor="t" lIns="36000" rIns="36000" tIns="18000" bIns="18000">
-            <a:spAutoFit/>
-          </a:bodyPr>
-          <a:lstStyle/>
-          <a:p>
-            <a:pPr algn="l">
-              <a:lnSpc>
-                <a:spcPct val="110000"/>
-              </a:lnSpc>
-              <a:spcAft>
-                <a:spcPts val="0"/>
-              </a:spcAft>
-            </a:pPr>
-            <a:r>
-              <a:rPr sz="900" b="0">
-                <a:solidFill>
-                  <a:srgbClr val="7F7F7F"/>
-                </a:solidFill>
-                <a:latin typeface="メイリオ"/>
-                <a:ea typeface="メイリオ"/>
-                <a:cs typeface="メイリオ"/>
-              </a:rPr>
-              <a:t>※数値は想定例</a:t>
-            </a:r>
-          </a:p>
-        </p:txBody>
-      </p:sp>
     </p:spTree>
   </p:cSld>
   <p:clrMapOvr>
@@ -5732,8 +5106,8 @@
 </p:sld>
 </file>
 
-<file path=ppt/slides/slide26.xml><?xml version="1.0" encoding="utf-8"?>
-<p:sld xmlns:a="http://schemas.openxmlformats.org/drawingml/2006/main" xmlns:p="http://schemas.openxmlformats.org/presentationml/2006/main" xmlns:r="http://schemas.openxmlformats.org/officeDocument/2006/relationships">
+<file path=ppt/slides/slide3.xml><?xml version="1.0" encoding="utf-8"?>
+<p:sld xmlns:a="http://schemas.openxmlformats.org/drawingml/2006/main" xmlns:r="http://schemas.openxmlformats.org/officeDocument/2006/relationships" xmlns:p="http://schemas.openxmlformats.org/presentationml/2006/main">
   <p:cSld>
     <p:spTree>
       <p:nvGrpSpPr>
@@ -5741,7 +5115,14 @@
         <p:cNvGrpSpPr/>
         <p:nvPr/>
       </p:nvGrpSpPr>
-      <p:grpSpPr/>
+      <p:grpSpPr>
+        <a:xfrm>
+          <a:off x="0" y="0"/>
+          <a:ext cx="0" cy="0"/>
+          <a:chOff x="0" y="0"/>
+          <a:chExt cx="0" cy="0"/>
+        </a:xfrm>
+      </p:grpSpPr>
       <p:sp>
         <p:nvSpPr>
           <p:cNvPr id="3" name="TextBox 1"/>
@@ -5902,10 +5283,11 @@
           </a:fontRef>
         </p:style>
         <p:txBody>
-          <a:bodyPr rtlCol="0" anchor="ctr" wrap="square" lIns="72000" tIns="18000" rIns="72000" bIns="18000"/>
+          <a:bodyPr wrap="square" lIns="72000" tIns="18000" rIns="72000" bIns="18000" rtlCol="0" anchor="ctr"/>
           <a:lstStyle/>
           <a:p>
             <a:pPr algn="ctr"/>
+            <a:endParaRPr/>
           </a:p>
         </p:txBody>
       </p:sp>
@@ -5926,7 +5308,7 @@
           <a:noFill/>
         </p:spPr>
         <p:txBody>
-          <a:bodyPr wrap="square" anchor="ctr" lIns="36000" rIns="36000" tIns="18000" bIns="18000">
+          <a:bodyPr wrap="square" lIns="36000" tIns="18000" rIns="36000" bIns="18000" anchor="ctr">
             <a:spAutoFit/>
           </a:bodyPr>
           <a:lstStyle/>
@@ -5992,10 +5374,11 @@
           </a:fontRef>
         </p:style>
         <p:txBody>
-          <a:bodyPr rtlCol="0" anchor="ctr" wrap="square" lIns="72000" tIns="18000" rIns="72000" bIns="18000"/>
+          <a:bodyPr wrap="square" lIns="72000" tIns="18000" rIns="72000" bIns="18000" rtlCol="0" anchor="ctr"/>
           <a:lstStyle/>
           <a:p>
             <a:pPr algn="ctr"/>
+            <a:endParaRPr/>
           </a:p>
         </p:txBody>
       </p:sp>
@@ -6016,7 +5399,7 @@
           <a:noFill/>
         </p:spPr>
         <p:txBody>
-          <a:bodyPr wrap="square" anchor="ctr" lIns="36000" rIns="36000" tIns="18000" bIns="18000">
+          <a:bodyPr wrap="square" lIns="36000" tIns="18000" rIns="36000" bIns="18000" anchor="ctr">
             <a:spAutoFit/>
           </a:bodyPr>
           <a:lstStyle/>
@@ -6082,10 +5465,11 @@
           </a:fontRef>
         </p:style>
         <p:txBody>
-          <a:bodyPr rtlCol="0" anchor="ctr" wrap="square" lIns="72000" tIns="18000" rIns="72000" bIns="18000"/>
+          <a:bodyPr wrap="square" lIns="72000" tIns="18000" rIns="72000" bIns="18000" rtlCol="0" anchor="ctr"/>
           <a:lstStyle/>
           <a:p>
             <a:pPr algn="ctr"/>
+            <a:endParaRPr/>
           </a:p>
         </p:txBody>
       </p:sp>
@@ -6106,7 +5490,7 @@
           <a:noFill/>
         </p:spPr>
         <p:txBody>
-          <a:bodyPr wrap="square" anchor="ctr" lIns="36000" rIns="36000" tIns="18000" bIns="18000">
+          <a:bodyPr wrap="square" lIns="36000" tIns="18000" rIns="36000" bIns="18000" anchor="ctr">
             <a:spAutoFit/>
           </a:bodyPr>
           <a:lstStyle/>
@@ -6193,10 +5577,11 @@
           </a:fontRef>
         </p:style>
         <p:txBody>
-          <a:bodyPr rtlCol="0" anchor="ctr" wrap="square" lIns="72000" tIns="18000" rIns="72000" bIns="18000"/>
+          <a:bodyPr wrap="square" lIns="72000" tIns="18000" rIns="72000" bIns="18000" rtlCol="0" anchor="ctr"/>
           <a:lstStyle/>
           <a:p>
             <a:pPr algn="ctr"/>
+            <a:endParaRPr/>
           </a:p>
         </p:txBody>
       </p:sp>
@@ -6217,7 +5602,7 @@
           <a:noFill/>
         </p:spPr>
         <p:txBody>
-          <a:bodyPr wrap="square" anchor="ctr" lIns="36000" rIns="36000" tIns="18000" bIns="18000">
+          <a:bodyPr wrap="square" lIns="36000" tIns="18000" rIns="36000" bIns="18000" anchor="ctr">
             <a:spAutoFit/>
           </a:bodyPr>
           <a:lstStyle/>
@@ -6304,10 +5689,11 @@
           </a:fontRef>
         </p:style>
         <p:txBody>
-          <a:bodyPr rtlCol="0" anchor="ctr" wrap="square" lIns="72000" tIns="18000" rIns="72000" bIns="18000"/>
+          <a:bodyPr wrap="square" lIns="72000" tIns="18000" rIns="72000" bIns="18000" rtlCol="0" anchor="ctr"/>
           <a:lstStyle/>
           <a:p>
             <a:pPr algn="ctr"/>
+            <a:endParaRPr/>
           </a:p>
         </p:txBody>
       </p:sp>
@@ -6328,7 +5714,7 @@
           <a:noFill/>
         </p:spPr>
         <p:txBody>
-          <a:bodyPr wrap="square" anchor="ctr" lIns="36000" rIns="36000" tIns="18000" bIns="18000">
+          <a:bodyPr wrap="square" lIns="36000" tIns="18000" rIns="36000" bIns="18000" anchor="ctr">
             <a:spAutoFit/>
           </a:bodyPr>
           <a:lstStyle/>
@@ -6415,10 +5801,11 @@
           </a:fontRef>
         </p:style>
         <p:txBody>
-          <a:bodyPr rtlCol="0" anchor="ctr" wrap="square" lIns="72000" tIns="18000" rIns="72000" bIns="18000"/>
+          <a:bodyPr wrap="square" lIns="72000" tIns="18000" rIns="72000" bIns="18000" rtlCol="0" anchor="ctr"/>
           <a:lstStyle/>
           <a:p>
             <a:pPr algn="ctr"/>
+            <a:endParaRPr/>
           </a:p>
         </p:txBody>
       </p:sp>
@@ -6432,6 +5819,71 @@
           <a:xfrm>
             <a:off x="9779099" y="1764000"/>
             <a:ext cx="1405019" cy="936000"/>
+          </a:xfrm>
+          <a:prstGeom prst="rect">
+            <a:avLst/>
+          </a:prstGeom>
+          <a:noFill/>
+        </p:spPr>
+        <p:txBody>
+          <a:bodyPr wrap="square" lIns="36000" tIns="18000" rIns="36000" bIns="18000" anchor="ctr">
+            <a:spAutoFit/>
+          </a:bodyPr>
+          <a:lstStyle/>
+          <a:p>
+            <a:pPr algn="ctr">
+              <a:lnSpc>
+                <a:spcPct val="110000"/>
+              </a:lnSpc>
+              <a:spcAft>
+                <a:spcPts val="0"/>
+              </a:spcAft>
+            </a:pPr>
+            <a:r>
+              <a:rPr sz="1300" b="1">
+                <a:solidFill>
+                  <a:srgbClr val="FFFFFF"/>
+                </a:solidFill>
+                <a:latin typeface="メイリオ"/>
+                <a:ea typeface="メイリオ"/>
+                <a:cs typeface="メイリオ"/>
+              </a:rPr>
+              <a:t>来店・面談</a:t>
+            </a:r>
+          </a:p>
+          <a:p>
+            <a:pPr algn="ctr">
+              <a:lnSpc>
+                <a:spcPct val="110000"/>
+              </a:lnSpc>
+              <a:spcAft>
+                <a:spcPts val="0"/>
+              </a:spcAft>
+            </a:pPr>
+            <a:r>
+              <a:rPr sz="1300" b="1">
+                <a:solidFill>
+                  <a:srgbClr val="FFFFFF"/>
+                </a:solidFill>
+                <a:latin typeface="メイリオ"/>
+                <a:ea typeface="メイリオ"/>
+                <a:cs typeface="メイリオ"/>
+              </a:rPr>
+              <a:t>・購入</a:t>
+            </a:r>
+          </a:p>
+        </p:txBody>
+      </p:sp>
+      <p:sp>
+        <p:nvSpPr>
+          <p:cNvPr id="18" name="TextBox 17"/>
+          <p:cNvSpPr txBox="1"/>
+          <p:nvPr/>
+        </p:nvSpPr>
+        <p:spPr>
+          <a:xfrm>
+            <a:off x="792000" y="3204000"/>
+            <a:ext cx="3600000" cy="288000"/>
           </a:xfrm>
           <a:prstGeom prst="rect">
             <a:avLst/>
@@ -6444,7 +5896,7 @@
           </a:bodyPr>
           <a:lstStyle/>
           <a:p>
-            <a:pPr algn="ctr">
+            <a:pPr algn="l">
               <a:lnSpc>
                 <a:spcPct val="110000"/>
               </a:lnSpc>
@@ -6455,78 +5907,13 @@
             <a:r>
               <a:rPr sz="1300" b="1">
                 <a:solidFill>
-                  <a:srgbClr val="FFFFFF"/>
-                </a:solidFill>
-                <a:latin typeface="メイリオ"/>
-                <a:ea typeface="メイリオ"/>
-                <a:cs typeface="メイリオ"/>
-              </a:rPr>
-              <a:t>来店・面談</a:t>
-            </a:r>
-          </a:p>
-          <a:p>
-            <a:pPr algn="ctr">
-              <a:lnSpc>
-                <a:spcPct val="110000"/>
-              </a:lnSpc>
-              <a:spcAft>
-                <a:spcPts val="0"/>
-              </a:spcAft>
-            </a:pPr>
-            <a:r>
-              <a:rPr sz="1300" b="1">
-                <a:solidFill>
-                  <a:srgbClr val="FFFFFF"/>
-                </a:solidFill>
-                <a:latin typeface="メイリオ"/>
-                <a:ea typeface="メイリオ"/>
-                <a:cs typeface="メイリオ"/>
-              </a:rPr>
-              <a:t>・購入</a:t>
-            </a:r>
-          </a:p>
-        </p:txBody>
-      </p:sp>
-      <p:sp>
-        <p:nvSpPr>
-          <p:cNvPr id="18" name="TextBox 17"/>
-          <p:cNvSpPr txBox="1"/>
-          <p:nvPr/>
-        </p:nvSpPr>
-        <p:spPr>
-          <a:xfrm>
-            <a:off x="792000" y="3240000"/>
-            <a:ext cx="4140000" cy="360000"/>
-          </a:xfrm>
-          <a:prstGeom prst="rect">
-            <a:avLst/>
-          </a:prstGeom>
-          <a:noFill/>
-        </p:spPr>
-        <p:txBody>
-          <a:bodyPr wrap="square" anchor="ctr" lIns="36000" rIns="36000" tIns="10800" bIns="10800">
-            <a:spAutoFit/>
-          </a:bodyPr>
-          <a:lstStyle/>
-          <a:p>
-            <a:pPr algn="ctr">
-              <a:lnSpc>
-                <a:spcPct val="105000"/>
-              </a:lnSpc>
-              <a:spcAft>
-                <a:spcPts val="200"/>
-              </a:spcAft>
-            </a:pPr>
-            <a:r>
-              <a:rPr sz="1300" b="1">
-                <a:solidFill>
-                  <a:srgbClr val="7F7F7F"/>
-                </a:solidFill>
-                <a:latin typeface="メイリオ"/>
-                <a:ea typeface="メイリオ"/>
-                <a:cs typeface="メイリオ"/>
-              </a:rPr>
-              <a:t>100CVのうち</a:t>
+                  <a:srgbClr val="1F285A"/>
+                </a:solidFill>
+                <a:latin typeface="メイリオ"/>
+                <a:ea typeface="メイリオ"/>
+                <a:cs typeface="メイリオ"/>
+              </a:rPr>
+              <a:t>実績</a:t>
             </a:r>
           </a:p>
         </p:txBody>
@@ -6539,63 +5926,8 @@
         </p:nvSpPr>
         <p:spPr>
           <a:xfrm>
-            <a:off x="792000" y="3564000"/>
-            <a:ext cx="4140000" cy="936000"/>
-          </a:xfrm>
-          <a:prstGeom prst="rect">
-            <a:avLst/>
-          </a:prstGeom>
-          <a:noFill/>
-        </p:spPr>
-        <p:txBody>
-          <a:bodyPr wrap="square" anchor="ctr" lIns="36000" rIns="36000" tIns="10800" bIns="10800">
-            <a:spAutoFit/>
-          </a:bodyPr>
-          <a:lstStyle/>
-          <a:p>
-            <a:pPr algn="ctr">
-              <a:lnSpc>
-                <a:spcPct val="105000"/>
-              </a:lnSpc>
-              <a:spcAft>
-                <a:spcPts val="200"/>
-              </a:spcAft>
-            </a:pPr>
-            <a:r>
-              <a:rPr sz="5400" b="1">
-                <a:solidFill>
-                  <a:srgbClr val="0B7A3B"/>
-                </a:solidFill>
-                <a:latin typeface="メイリオ"/>
-                <a:ea typeface="メイリオ"/>
-                <a:cs typeface="メイリオ"/>
-              </a:rPr>
-              <a:t>30</a:t>
-            </a:r>
-            <a:r>
-              <a:rPr sz="2200" b="1">
-                <a:solidFill>
-                  <a:srgbClr val="0B7A3B"/>
-                </a:solidFill>
-                <a:latin typeface="メイリオ"/>
-                <a:ea typeface="メイリオ"/>
-                <a:cs typeface="メイリオ"/>
-              </a:rPr>
-              <a:t>人</a:t>
-            </a:r>
-          </a:p>
-        </p:txBody>
-      </p:sp>
-      <p:sp>
-        <p:nvSpPr>
-          <p:cNvPr id="20" name="TextBox 19"/>
-          <p:cNvSpPr txBox="1"/>
-          <p:nvPr/>
-        </p:nvSpPr>
-        <p:spPr>
-          <a:xfrm>
-            <a:off x="792000" y="4500000"/>
-            <a:ext cx="4140000" cy="576000"/>
+            <a:off x="936000" y="3528000"/>
+            <a:ext cx="3248000" cy="1655999"/>
           </a:xfrm>
           <a:prstGeom prst="rect">
             <a:avLst/>
@@ -6613,11 +5945,11 @@
                 <a:spcPct val="110000"/>
               </a:lnSpc>
               <a:spcAft>
-                <a:spcPts val="300"/>
-              </a:spcAft>
-            </a:pPr>
-            <a:r>
-              <a:rPr sz="1300" b="1">
+                <a:spcPts val="200"/>
+              </a:spcAft>
+            </a:pPr>
+            <a:r>
+              <a:rPr sz="1400" b="1">
                 <a:solidFill>
                   <a:srgbClr val="1F285A"/>
                 </a:solidFill>
@@ -6625,7 +5957,7 @@
                 <a:ea typeface="メイリオ"/>
                 <a:cs typeface="メイリオ"/>
               </a:rPr>
-              <a:t>がLINE友だち化（想定）</a:t>
+              <a:t>美容クリニック</a:t>
             </a:r>
           </a:p>
           <a:p>
@@ -6634,6 +5966,27 @@
                 <a:spcPct val="110000"/>
               </a:lnSpc>
               <a:spcAft>
+                <a:spcPts val="600"/>
+              </a:spcAft>
+            </a:pPr>
+            <a:r>
+              <a:rPr sz="1050" b="0">
+                <a:solidFill>
+                  <a:srgbClr val="7F7F7F"/>
+                </a:solidFill>
+                <a:latin typeface="メイリオ"/>
+                <a:ea typeface="メイリオ"/>
+                <a:cs typeface="メイリオ"/>
+              </a:rPr>
+              <a:t>予約確認・前日のお知らせをLINEで配信</a:t>
+            </a:r>
+          </a:p>
+          <a:p>
+            <a:pPr algn="ctr">
+              <a:lnSpc>
+                <a:spcPct val="110000"/>
+              </a:lnSpc>
+              <a:spcAft>
                 <a:spcPts val="0"/>
               </a:spcAft>
             </a:pPr>
@@ -6646,21 +5999,63 @@
                 <a:ea typeface="メイリオ"/>
                 <a:cs typeface="メイリオ"/>
               </a:rPr>
-              <a:t>この30人に、来店・面談・購入までフォローできる</a:t>
+              <a:t>予約後の来院率</a:t>
+            </a:r>
+          </a:p>
+          <a:p>
+            <a:pPr algn="ctr">
+              <a:lnSpc>
+                <a:spcPct val="110000"/>
+              </a:lnSpc>
+              <a:spcAft>
+                <a:spcPts val="0"/>
+              </a:spcAft>
+            </a:pPr>
+            <a:r>
+              <a:rPr sz="2600" b="1">
+                <a:solidFill>
+                  <a:srgbClr val="1F285A"/>
+                </a:solidFill>
+                <a:latin typeface="メイリオ"/>
+                <a:ea typeface="メイリオ"/>
+                <a:cs typeface="メイリオ"/>
+              </a:rPr>
+              <a:t>40〜50%改善</a:t>
+            </a:r>
+          </a:p>
+          <a:p>
+            <a:pPr algn="ctr">
+              <a:lnSpc>
+                <a:spcPct val="110000"/>
+              </a:lnSpc>
+              <a:spcAft>
+                <a:spcPts val="0"/>
+              </a:spcAft>
+            </a:pPr>
+            <a:r>
+              <a:rPr sz="950" b="0">
+                <a:solidFill>
+                  <a:srgbClr val="7F7F7F"/>
+                </a:solidFill>
+                <a:latin typeface="メイリオ"/>
+                <a:ea typeface="メイリオ"/>
+                <a:cs typeface="メイリオ"/>
+              </a:rPr>
+              <a:t/>
             </a:r>
           </a:p>
         </p:txBody>
       </p:sp>
       <p:cxnSp>
         <p:nvCxnSpPr>
-          <p:cNvPr id="21" name="Connector 20"/>
+          <p:cNvPr id="20" name="Connector 19"/>
           <p:cNvCxnSpPr/>
           <p:nvPr/>
         </p:nvCxnSpPr>
         <p:spPr>
           <a:xfrm>
-            <a:off x="5220000" y="3240000"/>
-            <a:ext cx="0" cy="2016000"/>
+            <a:off x="4328000" y="3564000"/>
+            <a:ext cx="0" cy="1584000"/>
           </a:xfrm>
           <a:prstGeom prst="line">
             <a:avLst/>
@@ -6688,442 +6083,14 @@
       </p:cxnSp>
       <p:sp>
         <p:nvSpPr>
-          <p:cNvPr id="22" name="TextBox 21"/>
+          <p:cNvPr id="21" name="TextBox 20"/>
           <p:cNvSpPr txBox="1"/>
           <p:nvPr/>
         </p:nvSpPr>
         <p:spPr>
           <a:xfrm>
-            <a:off x="5543999" y="3240000"/>
-            <a:ext cx="5400000" cy="288000"/>
-          </a:xfrm>
-          <a:prstGeom prst="rect">
-            <a:avLst/>
-          </a:prstGeom>
-          <a:noFill/>
-        </p:spPr>
-        <p:txBody>
-          <a:bodyPr wrap="square" anchor="ctr" lIns="36000" rIns="36000" tIns="18000" bIns="18000">
-            <a:spAutoFit/>
-          </a:bodyPr>
-          <a:lstStyle/>
-          <a:p>
-            <a:pPr algn="l">
-              <a:lnSpc>
-                <a:spcPct val="110000"/>
-              </a:lnSpc>
-              <a:spcAft>
-                <a:spcPts val="0"/>
-              </a:spcAft>
-            </a:pPr>
-            <a:r>
-              <a:rPr sz="1300" b="1">
-                <a:solidFill>
-                  <a:srgbClr val="1F285A"/>
-                </a:solidFill>
-                <a:latin typeface="メイリオ"/>
-                <a:ea typeface="メイリオ"/>
-                <a:cs typeface="メイリオ"/>
-              </a:rPr>
-              <a:t>施策の例</a:t>
-            </a:r>
-          </a:p>
-        </p:txBody>
-      </p:sp>
-      <p:sp>
-        <p:nvSpPr>
-          <p:cNvPr id="23" name="Rounded Rectangle 22"/>
-          <p:cNvSpPr/>
-          <p:nvPr/>
-        </p:nvSpPr>
-        <p:spPr>
-          <a:xfrm>
-            <a:off x="5543999" y="3636000"/>
-            <a:ext cx="1835999" cy="396000"/>
-          </a:xfrm>
-          <a:prstGeom prst="roundRect">
-            <a:avLst>
-              <a:gd name="adj" fmla="val 50000"/>
-            </a:avLst>
-          </a:prstGeom>
-          <a:solidFill>
-            <a:srgbClr val="F4F7FF"/>
-          </a:solidFill>
-          <a:ln>
-            <a:noFill/>
-          </a:ln>
-          <a:effectLst/>
-        </p:spPr>
-        <p:style>
-          <a:lnRef idx="1">
-            <a:schemeClr val="accent1"/>
-          </a:lnRef>
-          <a:fillRef idx="3">
-            <a:schemeClr val="accent1"/>
-          </a:fillRef>
-          <a:effectRef idx="0">
-            <a:schemeClr val="accent1"/>
-          </a:effectRef>
-          <a:fontRef idx="minor">
-            <a:schemeClr val="lt1"/>
-          </a:fontRef>
-        </p:style>
-        <p:txBody>
-          <a:bodyPr rtlCol="0" anchor="ctr" wrap="square" lIns="54000" tIns="0" rIns="54000" bIns="0"/>
-          <a:lstStyle/>
-          <a:p>
-            <a:pPr algn="ctr">
-              <a:lnSpc>
-                <a:spcPct val="110000"/>
-              </a:lnSpc>
-              <a:spcAft>
-                <a:spcPts val="0"/>
-              </a:spcAft>
-            </a:pPr>
-            <a:r>
-              <a:rPr sz="1150" b="1">
-                <a:solidFill>
-                  <a:srgbClr val="1F285A"/>
-                </a:solidFill>
-                <a:latin typeface="メイリオ"/>
-                <a:ea typeface="メイリオ"/>
-                <a:cs typeface="メイリオ"/>
-              </a:rPr>
-              <a:t>受付完了メッセージ</a:t>
-            </a:r>
-          </a:p>
-        </p:txBody>
-      </p:sp>
-      <p:sp>
-        <p:nvSpPr>
-          <p:cNvPr id="24" name="Rounded Rectangle 23"/>
-          <p:cNvSpPr/>
-          <p:nvPr/>
-        </p:nvSpPr>
-        <p:spPr>
-          <a:xfrm>
-            <a:off x="7487999" y="3636000"/>
-            <a:ext cx="1835999" cy="396000"/>
-          </a:xfrm>
-          <a:prstGeom prst="roundRect">
-            <a:avLst>
-              <a:gd name="adj" fmla="val 50000"/>
-            </a:avLst>
-          </a:prstGeom>
-          <a:solidFill>
-            <a:srgbClr val="F4F7FF"/>
-          </a:solidFill>
-          <a:ln>
-            <a:noFill/>
-          </a:ln>
-          <a:effectLst/>
-        </p:spPr>
-        <p:style>
-          <a:lnRef idx="1">
-            <a:schemeClr val="accent1"/>
-          </a:lnRef>
-          <a:fillRef idx="3">
-            <a:schemeClr val="accent1"/>
-          </a:fillRef>
-          <a:effectRef idx="0">
-            <a:schemeClr val="accent1"/>
-          </a:effectRef>
-          <a:fontRef idx="minor">
-            <a:schemeClr val="lt1"/>
-          </a:fontRef>
-        </p:style>
-        <p:txBody>
-          <a:bodyPr rtlCol="0" anchor="ctr" wrap="square" lIns="54000" tIns="0" rIns="54000" bIns="0"/>
-          <a:lstStyle/>
-          <a:p>
-            <a:pPr algn="ctr">
-              <a:lnSpc>
-                <a:spcPct val="110000"/>
-              </a:lnSpc>
-              <a:spcAft>
-                <a:spcPts val="0"/>
-              </a:spcAft>
-            </a:pPr>
-            <a:r>
-              <a:rPr sz="1150" b="1">
-                <a:solidFill>
-                  <a:srgbClr val="1F285A"/>
-                </a:solidFill>
-                <a:latin typeface="メイリオ"/>
-                <a:ea typeface="メイリオ"/>
-                <a:cs typeface="メイリオ"/>
-              </a:rPr>
-              <a:t>前日・当日リマインド</a:t>
-            </a:r>
-          </a:p>
-        </p:txBody>
-      </p:sp>
-      <p:sp>
-        <p:nvSpPr>
-          <p:cNvPr id="25" name="Rounded Rectangle 24"/>
-          <p:cNvSpPr/>
-          <p:nvPr/>
-        </p:nvSpPr>
-        <p:spPr>
-          <a:xfrm>
-            <a:off x="9431999" y="3636000"/>
-            <a:ext cx="1835999" cy="396000"/>
-          </a:xfrm>
-          <a:prstGeom prst="roundRect">
-            <a:avLst>
-              <a:gd name="adj" fmla="val 50000"/>
-            </a:avLst>
-          </a:prstGeom>
-          <a:solidFill>
-            <a:srgbClr val="F4F7FF"/>
-          </a:solidFill>
-          <a:ln>
-            <a:noFill/>
-          </a:ln>
-          <a:effectLst/>
-        </p:spPr>
-        <p:style>
-          <a:lnRef idx="1">
-            <a:schemeClr val="accent1"/>
-          </a:lnRef>
-          <a:fillRef idx="3">
-            <a:schemeClr val="accent1"/>
-          </a:fillRef>
-          <a:effectRef idx="0">
-            <a:schemeClr val="accent1"/>
-          </a:effectRef>
-          <a:fontRef idx="minor">
-            <a:schemeClr val="lt1"/>
-          </a:fontRef>
-        </p:style>
-        <p:txBody>
-          <a:bodyPr rtlCol="0" anchor="ctr" wrap="square" lIns="54000" tIns="0" rIns="54000" bIns="0"/>
-          <a:lstStyle/>
-          <a:p>
-            <a:pPr algn="ctr">
-              <a:lnSpc>
-                <a:spcPct val="110000"/>
-              </a:lnSpc>
-              <a:spcAft>
-                <a:spcPts val="0"/>
-              </a:spcAft>
-            </a:pPr>
-            <a:r>
-              <a:rPr sz="1150" b="1">
-                <a:solidFill>
-                  <a:srgbClr val="1F285A"/>
-                </a:solidFill>
-                <a:latin typeface="メイリオ"/>
-                <a:ea typeface="メイリオ"/>
-                <a:cs typeface="メイリオ"/>
-              </a:rPr>
-              <a:t>日程変更の導線</a:t>
-            </a:r>
-          </a:p>
-        </p:txBody>
-      </p:sp>
-      <p:sp>
-        <p:nvSpPr>
-          <p:cNvPr id="26" name="Rounded Rectangle 25"/>
-          <p:cNvSpPr/>
-          <p:nvPr/>
-        </p:nvSpPr>
-        <p:spPr>
-          <a:xfrm>
-            <a:off x="5543999" y="4121999"/>
-            <a:ext cx="1835999" cy="396000"/>
-          </a:xfrm>
-          <a:prstGeom prst="roundRect">
-            <a:avLst>
-              <a:gd name="adj" fmla="val 50000"/>
-            </a:avLst>
-          </a:prstGeom>
-          <a:solidFill>
-            <a:srgbClr val="F4F7FF"/>
-          </a:solidFill>
-          <a:ln>
-            <a:noFill/>
-          </a:ln>
-          <a:effectLst/>
-        </p:spPr>
-        <p:style>
-          <a:lnRef idx="1">
-            <a:schemeClr val="accent1"/>
-          </a:lnRef>
-          <a:fillRef idx="3">
-            <a:schemeClr val="accent1"/>
-          </a:fillRef>
-          <a:effectRef idx="0">
-            <a:schemeClr val="accent1"/>
-          </a:effectRef>
-          <a:fontRef idx="minor">
-            <a:schemeClr val="lt1"/>
-          </a:fontRef>
-        </p:style>
-        <p:txBody>
-          <a:bodyPr rtlCol="0" anchor="ctr" wrap="square" lIns="54000" tIns="0" rIns="54000" bIns="0"/>
-          <a:lstStyle/>
-          <a:p>
-            <a:pPr algn="ctr">
-              <a:lnSpc>
-                <a:spcPct val="110000"/>
-              </a:lnSpc>
-              <a:spcAft>
-                <a:spcPts val="0"/>
-              </a:spcAft>
-            </a:pPr>
-            <a:r>
-              <a:rPr sz="1150" b="1">
-                <a:solidFill>
-                  <a:srgbClr val="1F285A"/>
-                </a:solidFill>
-                <a:latin typeface="メイリオ"/>
-                <a:ea typeface="メイリオ"/>
-                <a:cs typeface="メイリオ"/>
-              </a:rPr>
-              <a:t>よくある質問</a:t>
-            </a:r>
-          </a:p>
-        </p:txBody>
-      </p:sp>
-      <p:sp>
-        <p:nvSpPr>
-          <p:cNvPr id="27" name="Rounded Rectangle 26"/>
-          <p:cNvSpPr/>
-          <p:nvPr/>
-        </p:nvSpPr>
-        <p:spPr>
-          <a:xfrm>
-            <a:off x="7487999" y="4121999"/>
-            <a:ext cx="1835999" cy="396000"/>
-          </a:xfrm>
-          <a:prstGeom prst="roundRect">
-            <a:avLst>
-              <a:gd name="adj" fmla="val 50000"/>
-            </a:avLst>
-          </a:prstGeom>
-          <a:solidFill>
-            <a:srgbClr val="F4F7FF"/>
-          </a:solidFill>
-          <a:ln>
-            <a:noFill/>
-          </a:ln>
-          <a:effectLst/>
-        </p:spPr>
-        <p:style>
-          <a:lnRef idx="1">
-            <a:schemeClr val="accent1"/>
-          </a:lnRef>
-          <a:fillRef idx="3">
-            <a:schemeClr val="accent1"/>
-          </a:fillRef>
-          <a:effectRef idx="0">
-            <a:schemeClr val="accent1"/>
-          </a:effectRef>
-          <a:fontRef idx="minor">
-            <a:schemeClr val="lt1"/>
-          </a:fontRef>
-        </p:style>
-        <p:txBody>
-          <a:bodyPr rtlCol="0" anchor="ctr" wrap="square" lIns="54000" tIns="0" rIns="54000" bIns="0"/>
-          <a:lstStyle/>
-          <a:p>
-            <a:pPr algn="ctr">
-              <a:lnSpc>
-                <a:spcPct val="110000"/>
-              </a:lnSpc>
-              <a:spcAft>
-                <a:spcPts val="0"/>
-              </a:spcAft>
-            </a:pPr>
-            <a:r>
-              <a:rPr sz="1150" b="1">
-                <a:solidFill>
-                  <a:srgbClr val="1F285A"/>
-                </a:solidFill>
-                <a:latin typeface="メイリオ"/>
-                <a:ea typeface="メイリオ"/>
-                <a:cs typeface="メイリオ"/>
-              </a:rPr>
-              <a:t>不安解消コンテンツ</a:t>
-            </a:r>
-          </a:p>
-        </p:txBody>
-      </p:sp>
-      <p:sp>
-        <p:nvSpPr>
-          <p:cNvPr id="28" name="Rounded Rectangle 27"/>
-          <p:cNvSpPr/>
-          <p:nvPr/>
-        </p:nvSpPr>
-        <p:spPr>
-          <a:xfrm>
-            <a:off x="9431999" y="4121999"/>
-            <a:ext cx="1835999" cy="396000"/>
-          </a:xfrm>
-          <a:prstGeom prst="roundRect">
-            <a:avLst>
-              <a:gd name="adj" fmla="val 50000"/>
-            </a:avLst>
-          </a:prstGeom>
-          <a:solidFill>
-            <a:srgbClr val="F4F7FF"/>
-          </a:solidFill>
-          <a:ln>
-            <a:noFill/>
-          </a:ln>
-          <a:effectLst/>
-        </p:spPr>
-        <p:style>
-          <a:lnRef idx="1">
-            <a:schemeClr val="accent1"/>
-          </a:lnRef>
-          <a:fillRef idx="3">
-            <a:schemeClr val="accent1"/>
-          </a:fillRef>
-          <a:effectRef idx="0">
-            <a:schemeClr val="accent1"/>
-          </a:effectRef>
-          <a:fontRef idx="minor">
-            <a:schemeClr val="lt1"/>
-          </a:fontRef>
-        </p:style>
-        <p:txBody>
-          <a:bodyPr rtlCol="0" anchor="ctr" wrap="square" lIns="54000" tIns="0" rIns="54000" bIns="0"/>
-          <a:lstStyle/>
-          <a:p>
-            <a:pPr algn="ctr">
-              <a:lnSpc>
-                <a:spcPct val="110000"/>
-              </a:lnSpc>
-              <a:spcAft>
-                <a:spcPts val="0"/>
-              </a:spcAft>
-            </a:pPr>
-            <a:r>
-              <a:rPr sz="1150" b="1">
-                <a:solidFill>
-                  <a:srgbClr val="1F285A"/>
-                </a:solidFill>
-                <a:latin typeface="メイリオ"/>
-                <a:ea typeface="メイリオ"/>
-                <a:cs typeface="メイリオ"/>
-              </a:rPr>
-              <a:t>来店前のご案内</a:t>
-            </a:r>
-          </a:p>
-        </p:txBody>
-      </p:sp>
-      <p:sp>
-        <p:nvSpPr>
-          <p:cNvPr id="29" name="TextBox 28"/>
-          <p:cNvSpPr txBox="1"/>
-          <p:nvPr/>
-        </p:nvSpPr>
-        <p:spPr>
-          <a:xfrm>
-            <a:off x="792000" y="6192000"/>
-            <a:ext cx="10608119" cy="216000"/>
+            <a:off x="4472000" y="3528000"/>
+            <a:ext cx="3248000" cy="1655999"/>
           </a:xfrm>
           <a:prstGeom prst="rect">
             <a:avLst/>
@@ -7136,7 +6103,49 @@
           </a:bodyPr>
           <a:lstStyle/>
           <a:p>
-            <a:pPr algn="l">
+            <a:pPr algn="ctr">
+              <a:lnSpc>
+                <a:spcPct val="110000"/>
+              </a:lnSpc>
+              <a:spcAft>
+                <a:spcPts val="200"/>
+              </a:spcAft>
+            </a:pPr>
+            <a:r>
+              <a:rPr sz="1400" b="1">
+                <a:solidFill>
+                  <a:srgbClr val="1F285A"/>
+                </a:solidFill>
+                <a:latin typeface="メイリオ"/>
+                <a:ea typeface="メイリオ"/>
+                <a:cs typeface="メイリオ"/>
+              </a:rPr>
+              <a:t>皮膚科クリニック</a:t>
+            </a:r>
+          </a:p>
+          <a:p>
+            <a:pPr algn="ctr">
+              <a:lnSpc>
+                <a:spcPct val="110000"/>
+              </a:lnSpc>
+              <a:spcAft>
+                <a:spcPts val="600"/>
+              </a:spcAft>
+            </a:pPr>
+            <a:r>
+              <a:rPr sz="1050" b="0">
+                <a:solidFill>
+                  <a:srgbClr val="7F7F7F"/>
+                </a:solidFill>
+                <a:latin typeface="メイリオ"/>
+                <a:ea typeface="メイリオ"/>
+                <a:cs typeface="メイリオ"/>
+              </a:rPr>
+              <a:t>友だち追加後のステップ配信</a:t>
+            </a:r>
+          </a:p>
+          <a:p>
+            <a:pPr algn="ctr">
               <a:lnSpc>
                 <a:spcPct val="110000"/>
               </a:lnSpc>
@@ -7145,7 +6154,49 @@
               </a:spcAft>
             </a:pPr>
             <a:r>
-              <a:rPr sz="900" b="0">
+              <a:rPr sz="1150" b="0">
+                <a:solidFill>
+                  <a:srgbClr val="333333"/>
+                </a:solidFill>
+                <a:latin typeface="メイリオ"/>
+                <a:ea typeface="メイリオ"/>
+                <a:cs typeface="メイリオ"/>
+              </a:rPr>
+              <a:t>LINE経由の予約数</a:t>
+            </a:r>
+          </a:p>
+          <a:p>
+            <a:pPr algn="ctr">
+              <a:lnSpc>
+                <a:spcPct val="110000"/>
+              </a:lnSpc>
+              <a:spcAft>
+                <a:spcPts val="0"/>
+              </a:spcAft>
+            </a:pPr>
+            <a:r>
+              <a:rPr sz="3400" b="1">
+                <a:solidFill>
+                  <a:srgbClr val="1F285A"/>
+                </a:solidFill>
+                <a:latin typeface="メイリオ"/>
+                <a:ea typeface="メイリオ"/>
+                <a:cs typeface="メイリオ"/>
+              </a:rPr>
+              <a:t>約20%増</a:t>
+            </a:r>
+          </a:p>
+          <a:p>
+            <a:pPr algn="ctr">
+              <a:lnSpc>
+                <a:spcPct val="110000"/>
+              </a:lnSpc>
+              <a:spcAft>
+                <a:spcPts val="0"/>
+              </a:spcAft>
+            </a:pPr>
+            <a:r>
+              <a:rPr sz="950" b="0">
                 <a:solidFill>
                   <a:srgbClr val="7F7F7F"/>
                 </a:solidFill>
@@ -7153,7 +6204,170 @@
                 <a:ea typeface="メイリオ"/>
                 <a:cs typeface="メイリオ"/>
               </a:rPr>
-              <a:t>※数値は想定例（改善率を示すものではない）</a:t>
+              <a:t>ステップ配信の実施前との比較</a:t>
+            </a:r>
+          </a:p>
+        </p:txBody>
+      </p:sp>
+      <p:cxnSp>
+        <p:nvCxnSpPr>
+          <p:cNvPr id="22" name="Connector 21"/>
+          <p:cNvCxnSpPr/>
+          <p:nvPr/>
+        </p:nvCxnSpPr>
+        <p:spPr>
+          <a:xfrm>
+            <a:off x="7864000" y="3564000"/>
+            <a:ext cx="0" cy="1584000"/>
+          </a:xfrm>
+          <a:prstGeom prst="line">
+            <a:avLst/>
+          </a:prstGeom>
+          <a:ln w="9525">
+            <a:solidFill>
+              <a:srgbClr val="D9D9D9"/>
+            </a:solidFill>
+          </a:ln>
+        </p:spPr>
+        <p:style>
+          <a:lnRef idx="2">
+            <a:schemeClr val="accent1"/>
+          </a:lnRef>
+          <a:fillRef idx="0">
+            <a:schemeClr val="accent1"/>
+          </a:fillRef>
+          <a:effectRef idx="0">
+            <a:schemeClr val="accent1"/>
+          </a:effectRef>
+          <a:fontRef idx="minor">
+            <a:schemeClr val="tx1"/>
+          </a:fontRef>
+        </p:style>
+      </p:cxnSp>
+      <p:sp>
+        <p:nvSpPr>
+          <p:cNvPr id="23" name="TextBox 22"/>
+          <p:cNvSpPr txBox="1"/>
+          <p:nvPr/>
+        </p:nvSpPr>
+        <p:spPr>
+          <a:xfrm>
+            <a:off x="8008000" y="3528000"/>
+            <a:ext cx="3248000" cy="1655999"/>
+          </a:xfrm>
+          <a:prstGeom prst="rect">
+            <a:avLst/>
+          </a:prstGeom>
+          <a:noFill/>
+        </p:spPr>
+        <p:txBody>
+          <a:bodyPr wrap="square" anchor="t" lIns="36000" rIns="36000" tIns="18000" bIns="18000">
+            <a:spAutoFit/>
+          </a:bodyPr>
+          <a:lstStyle/>
+          <a:p>
+            <a:pPr algn="ctr">
+              <a:lnSpc>
+                <a:spcPct val="110000"/>
+              </a:lnSpc>
+              <a:spcAft>
+                <a:spcPts val="200"/>
+              </a:spcAft>
+            </a:pPr>
+            <a:r>
+              <a:rPr sz="1400" b="1">
+                <a:solidFill>
+                  <a:srgbClr val="1F285A"/>
+                </a:solidFill>
+                <a:latin typeface="メイリオ"/>
+                <a:ea typeface="メイリオ"/>
+                <a:cs typeface="メイリオ"/>
+              </a:rPr>
+              <a:t>就職支援</a:t>
+            </a:r>
+          </a:p>
+          <a:p>
+            <a:pPr algn="ctr">
+              <a:lnSpc>
+                <a:spcPct val="110000"/>
+              </a:lnSpc>
+              <a:spcAft>
+                <a:spcPts val="600"/>
+              </a:spcAft>
+            </a:pPr>
+            <a:r>
+              <a:rPr sz="1050" b="0">
+                <a:solidFill>
+                  <a:srgbClr val="7F7F7F"/>
+                </a:solidFill>
+                <a:latin typeface="メイリオ"/>
+                <a:ea typeface="メイリオ"/>
+                <a:cs typeface="メイリオ"/>
+              </a:rPr>
+              <a:t>LINEのチャットで面談へ誘導</a:t>
+            </a:r>
+          </a:p>
+          <a:p>
+            <a:pPr algn="ctr">
+              <a:lnSpc>
+                <a:spcPct val="110000"/>
+              </a:lnSpc>
+              <a:spcAft>
+                <a:spcPts val="0"/>
+              </a:spcAft>
+            </a:pPr>
+            <a:r>
+              <a:rPr sz="1150" b="0">
+                <a:solidFill>
+                  <a:srgbClr val="333333"/>
+                </a:solidFill>
+                <a:latin typeface="メイリオ"/>
+                <a:ea typeface="メイリオ"/>
+                <a:cs typeface="メイリオ"/>
+              </a:rPr>
+              <a:t>LINEで問い合わせた方のうち</a:t>
+            </a:r>
+          </a:p>
+          <a:p>
+            <a:pPr algn="ctr">
+              <a:lnSpc>
+                <a:spcPct val="110000"/>
+              </a:lnSpc>
+              <a:spcAft>
+                <a:spcPts val="0"/>
+              </a:spcAft>
+            </a:pPr>
+            <a:r>
+              <a:rPr sz="3400" b="1">
+                <a:solidFill>
+                  <a:srgbClr val="1F285A"/>
+                </a:solidFill>
+                <a:latin typeface="メイリオ"/>
+                <a:ea typeface="メイリオ"/>
+                <a:cs typeface="メイリオ"/>
+              </a:rPr>
+              <a:t>55%</a:t>
+            </a:r>
+          </a:p>
+          <a:p>
+            <a:pPr algn="ctr">
+              <a:lnSpc>
+                <a:spcPct val="110000"/>
+              </a:lnSpc>
+              <a:spcAft>
+                <a:spcPts val="0"/>
+              </a:spcAft>
+            </a:pPr>
+            <a:r>
+              <a:rPr sz="950" b="0">
+                <a:solidFill>
+                  <a:srgbClr val="7F7F7F"/>
+                </a:solidFill>
+                <a:latin typeface="メイリオ"/>
+                <a:ea typeface="メイリオ"/>
+                <a:cs typeface="メイリオ"/>
+              </a:rPr>
+              <a:t>が面談を予約</a:t>
             </a:r>
           </a:p>
         </p:txBody>
@@ -7166,8 +6380,8 @@
 </p:sld>
 </file>
 
-<file path=ppt/slides/slide27.xml><?xml version="1.0" encoding="utf-8"?>
-<p:sld xmlns:a="http://schemas.openxmlformats.org/drawingml/2006/main" xmlns:p="http://schemas.openxmlformats.org/presentationml/2006/main" xmlns:r="http://schemas.openxmlformats.org/officeDocument/2006/relationships">
+<file path=ppt/slides/slide4.xml><?xml version="1.0" encoding="utf-8"?>
+<p:sld xmlns:a="http://schemas.openxmlformats.org/drawingml/2006/main" xmlns:r="http://schemas.openxmlformats.org/officeDocument/2006/relationships" xmlns:p="http://schemas.openxmlformats.org/presentationml/2006/main">
   <p:cSld>
     <p:spTree>
       <p:nvGrpSpPr>
@@ -7175,7 +6389,14 @@
         <p:cNvGrpSpPr/>
         <p:nvPr/>
       </p:nvGrpSpPr>
-      <p:grpSpPr/>
+      <p:grpSpPr>
+        <a:xfrm>
+          <a:off x="0" y="0"/>
+          <a:ext cx="0" cy="0"/>
+          <a:chOff x="0" y="0"/>
+          <a:chExt cx="0" cy="0"/>
+        </a:xfrm>
+      </p:grpSpPr>
       <p:sp>
         <p:nvSpPr>
           <p:cNvPr id="3" name="TextBox 1"/>
@@ -7305,8 +6526,8 @@
         </p:nvSpPr>
         <p:spPr>
           <a:xfrm>
-            <a:off x="792000" y="3096000"/>
-            <a:ext cx="1678019" cy="720000"/>
+            <a:off x="792000" y="2736000"/>
+            <a:ext cx="1678000" cy="648000"/>
           </a:xfrm>
           <a:prstGeom prst="rect">
             <a:avLst/>
@@ -7349,8 +6570,8 @@
         </p:nvSpPr>
         <p:spPr>
           <a:xfrm>
-            <a:off x="792000" y="3096000"/>
-            <a:ext cx="1678019" cy="720000"/>
+            <a:off x="792000" y="2736000"/>
+            <a:ext cx="1678000" cy="648000"/>
           </a:xfrm>
           <a:prstGeom prst="rect">
             <a:avLst/>
@@ -7372,7 +6593,7 @@
               </a:spcAft>
             </a:pPr>
             <a:r>
-              <a:rPr sz="1250" b="1">
+              <a:rPr sz="1200" b="1">
                 <a:solidFill>
                   <a:srgbClr val="1F285A"/>
                 </a:solidFill>
@@ -7393,7 +6614,7 @@
               </a:spcAft>
             </a:pPr>
             <a:r>
-              <a:rPr sz="1250" b="1">
+              <a:rPr sz="1200" b="1">
                 <a:solidFill>
                   <a:srgbClr val="1F285A"/>
                 </a:solidFill>
@@ -7414,8 +6635,8 @@
         </p:nvSpPr>
         <p:spPr>
           <a:xfrm>
-            <a:off x="2578019" y="2898000"/>
-            <a:ext cx="1678019" cy="917999"/>
+            <a:off x="2578000" y="2574000"/>
+            <a:ext cx="1678000" cy="810000"/>
           </a:xfrm>
           <a:prstGeom prst="rect">
             <a:avLst/>
@@ -7458,8 +6679,8 @@
         </p:nvSpPr>
         <p:spPr>
           <a:xfrm>
-            <a:off x="2578019" y="2898000"/>
-            <a:ext cx="1678019" cy="917999"/>
+            <a:off x="2578000" y="2574000"/>
+            <a:ext cx="1678000" cy="810000"/>
           </a:xfrm>
           <a:prstGeom prst="rect">
             <a:avLst/>
@@ -7481,7 +6702,7 @@
               </a:spcAft>
             </a:pPr>
             <a:r>
-              <a:rPr sz="1250" b="1">
+              <a:rPr sz="1200" b="1">
                 <a:solidFill>
                   <a:srgbClr val="1F285A"/>
                 </a:solidFill>
@@ -7489,7 +6710,7 @@
                 <a:ea typeface="メイリオ"/>
                 <a:cs typeface="メイリオ"/>
               </a:rPr>
-              <a:t>LINE</a:t>
+              <a:t>LINEで</a:t>
             </a:r>
           </a:p>
           <a:p>
@@ -7502,7 +6723,7 @@
               </a:spcAft>
             </a:pPr>
             <a:r>
-              <a:rPr sz="1250" b="1">
+              <a:rPr sz="1200" b="1">
                 <a:solidFill>
                   <a:srgbClr val="1F285A"/>
                 </a:solidFill>
@@ -7523,8 +6744,8 @@
         </p:nvSpPr>
         <p:spPr>
           <a:xfrm>
-            <a:off x="4364039" y="2700000"/>
-            <a:ext cx="1678019" cy="1116000"/>
+            <a:off x="4364000" y="2412000"/>
+            <a:ext cx="1678000" cy="972000"/>
           </a:xfrm>
           <a:prstGeom prst="rect">
             <a:avLst/>
@@ -7567,8 +6788,8 @@
         </p:nvSpPr>
         <p:spPr>
           <a:xfrm>
-            <a:off x="4364039" y="2700000"/>
-            <a:ext cx="1678019" cy="1116000"/>
+            <a:off x="4364000" y="2412000"/>
+            <a:ext cx="1678000" cy="972000"/>
           </a:xfrm>
           <a:prstGeom prst="rect">
             <a:avLst/>
@@ -7590,7 +6811,7 @@
               </a:spcAft>
             </a:pPr>
             <a:r>
-              <a:rPr sz="1250" b="1">
+              <a:rPr sz="1200" b="1">
                 <a:solidFill>
                   <a:srgbClr val="1F285A"/>
                 </a:solidFill>
@@ -7611,7 +6832,7 @@
               </a:spcAft>
             </a:pPr>
             <a:r>
-              <a:rPr sz="1250" b="1">
+              <a:rPr sz="1200" b="1">
                 <a:solidFill>
                   <a:srgbClr val="1F285A"/>
                 </a:solidFill>
@@ -7632,8 +6853,8 @@
         </p:nvSpPr>
         <p:spPr>
           <a:xfrm>
-            <a:off x="6150059" y="2501999"/>
-            <a:ext cx="1678019" cy="1314000"/>
+            <a:off x="6150000" y="2250000"/>
+            <a:ext cx="1678000" cy="1134000"/>
           </a:xfrm>
           <a:prstGeom prst="rect">
             <a:avLst/>
@@ -7676,8 +6897,8 @@
         </p:nvSpPr>
         <p:spPr>
           <a:xfrm>
-            <a:off x="6150059" y="2501999"/>
-            <a:ext cx="1678019" cy="1314000"/>
+            <a:off x="6150000" y="2250000"/>
+            <a:ext cx="1678000" cy="1134000"/>
           </a:xfrm>
           <a:prstGeom prst="rect">
             <a:avLst/>
@@ -7699,7 +6920,7 @@
               </a:spcAft>
             </a:pPr>
             <a:r>
-              <a:rPr sz="1250" b="1">
+              <a:rPr sz="1200" b="1">
                 <a:solidFill>
                   <a:srgbClr val="FFFFFF"/>
                 </a:solidFill>
@@ -7720,7 +6941,7 @@
               </a:spcAft>
             </a:pPr>
             <a:r>
-              <a:rPr sz="1250" b="1">
+              <a:rPr sz="1200" b="1">
                 <a:solidFill>
                   <a:srgbClr val="FFFFFF"/>
                 </a:solidFill>
@@ -7741,8 +6962,8 @@
         </p:nvSpPr>
         <p:spPr>
           <a:xfrm>
-            <a:off x="7936079" y="2304000"/>
-            <a:ext cx="1678019" cy="1512000"/>
+            <a:off x="7936000" y="2088000"/>
+            <a:ext cx="1678000" cy="1296000"/>
           </a:xfrm>
           <a:prstGeom prst="rect">
             <a:avLst/>
@@ -7785,8 +7006,8 @@
         </p:nvSpPr>
         <p:spPr>
           <a:xfrm>
-            <a:off x="7936079" y="2304000"/>
-            <a:ext cx="1678019" cy="1512000"/>
+            <a:off x="7936000" y="2088000"/>
+            <a:ext cx="1678000" cy="1296000"/>
           </a:xfrm>
           <a:prstGeom prst="rect">
             <a:avLst/>
@@ -7808,7 +7029,7 @@
               </a:spcAft>
             </a:pPr>
             <a:r>
-              <a:rPr sz="1250" b="1">
+              <a:rPr sz="1200" b="1">
                 <a:solidFill>
                   <a:srgbClr val="FFFFFF"/>
                 </a:solidFill>
@@ -7829,7 +7050,7 @@
               </a:spcAft>
             </a:pPr>
             <a:r>
-              <a:rPr sz="1250" b="1">
+              <a:rPr sz="1200" b="1">
                 <a:solidFill>
                   <a:srgbClr val="FFFFFF"/>
                 </a:solidFill>
@@ -7850,8 +7071,8 @@
         </p:nvSpPr>
         <p:spPr>
           <a:xfrm>
-            <a:off x="9722099" y="2106000"/>
-            <a:ext cx="1678019" cy="1710000"/>
+            <a:off x="9722000" y="1926000"/>
+            <a:ext cx="1678000" cy="1458000"/>
           </a:xfrm>
           <a:prstGeom prst="rect">
             <a:avLst/>
@@ -7894,8 +7115,8 @@
         </p:nvSpPr>
         <p:spPr>
           <a:xfrm>
-            <a:off x="9722099" y="2106000"/>
-            <a:ext cx="1678019" cy="1710000"/>
+            <a:off x="9722000" y="1926000"/>
+            <a:ext cx="1678000" cy="1458000"/>
           </a:xfrm>
           <a:prstGeom prst="rect">
             <a:avLst/>
@@ -7917,7 +7138,7 @@
               </a:spcAft>
             </a:pPr>
             <a:r>
-              <a:rPr sz="1250" b="1">
+              <a:rPr sz="1200" b="1">
                 <a:solidFill>
                   <a:srgbClr val="FFFFFF"/>
                 </a:solidFill>
@@ -7938,7 +7159,7 @@
               </a:spcAft>
             </a:pPr>
             <a:r>
-              <a:rPr sz="1250" b="1">
+              <a:rPr sz="1200" b="1">
                 <a:solidFill>
                   <a:srgbClr val="FFFFFF"/>
                 </a:solidFill>
@@ -7947,29 +7168,500 @@
                 <a:cs typeface="メイリオ"/>
               </a:rPr>
               <a:t>向上</a:t>
+            </a:r>
+          </a:p>
+        </p:txBody>
+      </p:sp>
+      <p:sp>
+        <p:nvSpPr>
+          <p:cNvPr id="18" name="TextBox 17"/>
+          <p:cNvSpPr txBox="1"/>
+          <p:nvPr/>
+        </p:nvSpPr>
+        <p:spPr>
+          <a:xfrm>
+            <a:off x="792000" y="3510000"/>
+            <a:ext cx="1152000" cy="288000"/>
+          </a:xfrm>
+          <a:prstGeom prst="rect">
+            <a:avLst/>
+          </a:prstGeom>
+          <a:noFill/>
+        </p:spPr>
+        <p:txBody>
+          <a:bodyPr wrap="square" anchor="ctr" lIns="36000" rIns="36000" tIns="18000" bIns="18000">
+            <a:spAutoFit/>
+          </a:bodyPr>
+          <a:lstStyle/>
+          <a:p>
+            <a:pPr algn="l">
+              <a:lnSpc>
+                <a:spcPct val="110000"/>
+              </a:lnSpc>
+              <a:spcAft>
+                <a:spcPts val="0"/>
+              </a:spcAft>
+            </a:pPr>
+            <a:r>
+              <a:rPr sz="1150" b="1">
+                <a:solidFill>
+                  <a:srgbClr val="1F285A"/>
+                </a:solidFill>
+                <a:latin typeface="メイリオ"/>
+                <a:ea typeface="メイリオ"/>
+                <a:cs typeface="メイリオ"/>
+              </a:rPr>
+              <a:t>施策の例</a:t>
+            </a:r>
+          </a:p>
+        </p:txBody>
+      </p:sp>
+      <p:sp>
+        <p:nvSpPr>
+          <p:cNvPr id="19" name="Rounded Rectangle 18"/>
+          <p:cNvSpPr/>
+          <p:nvPr/>
+        </p:nvSpPr>
+        <p:spPr>
+          <a:xfrm>
+            <a:off x="2015999" y="3510000"/>
+            <a:ext cx="2265000" cy="288000"/>
+          </a:xfrm>
+          <a:prstGeom prst="roundRect">
+            <a:avLst>
+              <a:gd name="adj" fmla="val 50000"/>
+            </a:avLst>
+          </a:prstGeom>
+          <a:solidFill>
+            <a:srgbClr val="F4F7FF"/>
+          </a:solidFill>
+          <a:ln>
+            <a:noFill/>
+          </a:ln>
+          <a:effectLst/>
+        </p:spPr>
+        <p:style>
+          <a:lnRef idx="1">
+            <a:schemeClr val="accent1"/>
+          </a:lnRef>
+          <a:fillRef idx="3">
+            <a:schemeClr val="accent1"/>
+          </a:fillRef>
+          <a:effectRef idx="0">
+            <a:schemeClr val="accent1"/>
+          </a:effectRef>
+          <a:fontRef idx="minor">
+            <a:schemeClr val="lt1"/>
+          </a:fontRef>
+        </p:style>
+        <p:txBody>
+          <a:bodyPr rtlCol="0" anchor="ctr" wrap="square" lIns="36000" tIns="0" rIns="36000" bIns="0"/>
+          <a:lstStyle/>
+          <a:p>
+            <a:pPr algn="ctr">
+              <a:lnSpc>
+                <a:spcPct val="110000"/>
+              </a:lnSpc>
+              <a:spcAft>
+                <a:spcPts val="0"/>
+              </a:spcAft>
+            </a:pPr>
+            <a:r>
+              <a:rPr sz="1100" b="1">
+                <a:solidFill>
+                  <a:srgbClr val="1F285A"/>
+                </a:solidFill>
+                <a:latin typeface="メイリオ"/>
+                <a:ea typeface="メイリオ"/>
+                <a:cs typeface="メイリオ"/>
+              </a:rPr>
+              <a:t>来店後フォロー</a:t>
+            </a:r>
+          </a:p>
+        </p:txBody>
+      </p:sp>
+      <p:sp>
+        <p:nvSpPr>
+          <p:cNvPr id="20" name="Rounded Rectangle 19"/>
+          <p:cNvSpPr/>
+          <p:nvPr/>
+        </p:nvSpPr>
+        <p:spPr>
+          <a:xfrm>
+            <a:off x="4389000" y="3510000"/>
+            <a:ext cx="2265000" cy="288000"/>
+          </a:xfrm>
+          <a:prstGeom prst="roundRect">
+            <a:avLst>
+              <a:gd name="adj" fmla="val 50000"/>
+            </a:avLst>
+          </a:prstGeom>
+          <a:solidFill>
+            <a:srgbClr val="F4F7FF"/>
+          </a:solidFill>
+          <a:ln>
+            <a:noFill/>
+          </a:ln>
+          <a:effectLst/>
+        </p:spPr>
+        <p:style>
+          <a:lnRef idx="1">
+            <a:schemeClr val="accent1"/>
+          </a:lnRef>
+          <a:fillRef idx="3">
+            <a:schemeClr val="accent1"/>
+          </a:fillRef>
+          <a:effectRef idx="0">
+            <a:schemeClr val="accent1"/>
+          </a:effectRef>
+          <a:fontRef idx="minor">
+            <a:schemeClr val="lt1"/>
+          </a:fontRef>
+        </p:style>
+        <p:txBody>
+          <a:bodyPr rtlCol="0" anchor="ctr" wrap="square" lIns="36000" tIns="0" rIns="36000" bIns="0"/>
+          <a:lstStyle/>
+          <a:p>
+            <a:pPr algn="ctr">
+              <a:lnSpc>
+                <a:spcPct val="110000"/>
+              </a:lnSpc>
+              <a:spcAft>
+                <a:spcPts val="0"/>
+              </a:spcAft>
+            </a:pPr>
+            <a:r>
+              <a:rPr sz="1100" b="1">
+                <a:solidFill>
+                  <a:srgbClr val="1F285A"/>
+                </a:solidFill>
+                <a:latin typeface="メイリオ"/>
+                <a:ea typeface="メイリオ"/>
+                <a:cs typeface="メイリオ"/>
+              </a:rPr>
+              <a:t>関連サービス案内</a:t>
+            </a:r>
+          </a:p>
+        </p:txBody>
+      </p:sp>
+      <p:sp>
+        <p:nvSpPr>
+          <p:cNvPr id="21" name="Rounded Rectangle 20"/>
+          <p:cNvSpPr/>
+          <p:nvPr/>
+        </p:nvSpPr>
+        <p:spPr>
+          <a:xfrm>
+            <a:off x="6762000" y="3510000"/>
+            <a:ext cx="2265000" cy="288000"/>
+          </a:xfrm>
+          <a:prstGeom prst="roundRect">
+            <a:avLst>
+              <a:gd name="adj" fmla="val 50000"/>
+            </a:avLst>
+          </a:prstGeom>
+          <a:solidFill>
+            <a:srgbClr val="F4F7FF"/>
+          </a:solidFill>
+          <a:ln>
+            <a:noFill/>
+          </a:ln>
+          <a:effectLst/>
+        </p:spPr>
+        <p:style>
+          <a:lnRef idx="1">
+            <a:schemeClr val="accent1"/>
+          </a:lnRef>
+          <a:fillRef idx="3">
+            <a:schemeClr val="accent1"/>
+          </a:fillRef>
+          <a:effectRef idx="0">
+            <a:schemeClr val="accent1"/>
+          </a:effectRef>
+          <a:fontRef idx="minor">
+            <a:schemeClr val="lt1"/>
+          </a:fontRef>
+        </p:style>
+        <p:txBody>
+          <a:bodyPr rtlCol="0" anchor="ctr" wrap="square" lIns="36000" tIns="0" rIns="36000" bIns="0"/>
+          <a:lstStyle/>
+          <a:p>
+            <a:pPr algn="ctr">
+              <a:lnSpc>
+                <a:spcPct val="110000"/>
+              </a:lnSpc>
+              <a:spcAft>
+                <a:spcPts val="0"/>
+              </a:spcAft>
+            </a:pPr>
+            <a:r>
+              <a:rPr sz="1100" b="1">
+                <a:solidFill>
+                  <a:srgbClr val="1F285A"/>
+                </a:solidFill>
+                <a:latin typeface="メイリオ"/>
+                <a:ea typeface="メイリオ"/>
+                <a:cs typeface="メイリオ"/>
+              </a:rPr>
+              <a:t>クーポン配信</a:t>
+            </a:r>
+          </a:p>
+        </p:txBody>
+      </p:sp>
+      <p:sp>
+        <p:nvSpPr>
+          <p:cNvPr id="22" name="Rounded Rectangle 21"/>
+          <p:cNvSpPr/>
+          <p:nvPr/>
+        </p:nvSpPr>
+        <p:spPr>
+          <a:xfrm>
+            <a:off x="9135000" y="3510000"/>
+            <a:ext cx="2265000" cy="288000"/>
+          </a:xfrm>
+          <a:prstGeom prst="roundRect">
+            <a:avLst>
+              <a:gd name="adj" fmla="val 50000"/>
+            </a:avLst>
+          </a:prstGeom>
+          <a:solidFill>
+            <a:srgbClr val="F4F7FF"/>
+          </a:solidFill>
+          <a:ln>
+            <a:noFill/>
+          </a:ln>
+          <a:effectLst/>
+        </p:spPr>
+        <p:style>
+          <a:lnRef idx="1">
+            <a:schemeClr val="accent1"/>
+          </a:lnRef>
+          <a:fillRef idx="3">
+            <a:schemeClr val="accent1"/>
+          </a:fillRef>
+          <a:effectRef idx="0">
+            <a:schemeClr val="accent1"/>
+          </a:effectRef>
+          <a:fontRef idx="minor">
+            <a:schemeClr val="lt1"/>
+          </a:fontRef>
+        </p:style>
+        <p:txBody>
+          <a:bodyPr rtlCol="0" anchor="ctr" wrap="square" lIns="36000" tIns="0" rIns="36000" bIns="0"/>
+          <a:lstStyle/>
+          <a:p>
+            <a:pPr algn="ctr">
+              <a:lnSpc>
+                <a:spcPct val="110000"/>
+              </a:lnSpc>
+              <a:spcAft>
+                <a:spcPts val="0"/>
+              </a:spcAft>
+            </a:pPr>
+            <a:r>
+              <a:rPr sz="1100" b="1">
+                <a:solidFill>
+                  <a:srgbClr val="1F285A"/>
+                </a:solidFill>
+                <a:latin typeface="メイリオ"/>
+                <a:ea typeface="メイリオ"/>
+                <a:cs typeface="メイリオ"/>
+              </a:rPr>
+              <a:t>セグメント配信</a:t>
+            </a:r>
+          </a:p>
+        </p:txBody>
+      </p:sp>
+      <p:sp>
+        <p:nvSpPr>
+          <p:cNvPr id="23" name="TextBox 22"/>
+          <p:cNvSpPr txBox="1"/>
+          <p:nvPr/>
+        </p:nvSpPr>
+        <p:spPr>
+          <a:xfrm>
+            <a:off x="792000" y="3924000"/>
+            <a:ext cx="3600000" cy="288000"/>
+          </a:xfrm>
+          <a:prstGeom prst="rect">
+            <a:avLst/>
+          </a:prstGeom>
+          <a:noFill/>
+        </p:spPr>
+        <p:txBody>
+          <a:bodyPr wrap="square" anchor="ctr" lIns="36000" rIns="36000" tIns="18000" bIns="18000">
+            <a:spAutoFit/>
+          </a:bodyPr>
+          <a:lstStyle/>
+          <a:p>
+            <a:pPr algn="l">
+              <a:lnSpc>
+                <a:spcPct val="110000"/>
+              </a:lnSpc>
+              <a:spcAft>
+                <a:spcPts val="0"/>
+              </a:spcAft>
+            </a:pPr>
+            <a:r>
+              <a:rPr sz="1300" b="1">
+                <a:solidFill>
+                  <a:srgbClr val="1F285A"/>
+                </a:solidFill>
+                <a:latin typeface="メイリオ"/>
+                <a:ea typeface="メイリオ"/>
+                <a:cs typeface="メイリオ"/>
+              </a:rPr>
+              <a:t>実績</a:t>
+            </a:r>
+          </a:p>
+        </p:txBody>
+      </p:sp>
+      <p:sp>
+        <p:nvSpPr>
+          <p:cNvPr id="24" name="TextBox 23"/>
+          <p:cNvSpPr txBox="1"/>
+          <p:nvPr/>
+        </p:nvSpPr>
+        <p:spPr>
+          <a:xfrm>
+            <a:off x="936000" y="4248000"/>
+            <a:ext cx="3248000" cy="1655999"/>
+          </a:xfrm>
+          <a:prstGeom prst="rect">
+            <a:avLst/>
+          </a:prstGeom>
+          <a:noFill/>
+        </p:spPr>
+        <p:txBody>
+          <a:bodyPr wrap="square" anchor="t" lIns="36000" rIns="36000" tIns="18000" bIns="18000">
+            <a:spAutoFit/>
+          </a:bodyPr>
+          <a:lstStyle/>
+          <a:p>
+            <a:pPr algn="ctr">
+              <a:lnSpc>
+                <a:spcPct val="110000"/>
+              </a:lnSpc>
+              <a:spcAft>
+                <a:spcPts val="200"/>
+              </a:spcAft>
+            </a:pPr>
+            <a:r>
+              <a:rPr sz="1400" b="1">
+                <a:solidFill>
+                  <a:srgbClr val="1F285A"/>
+                </a:solidFill>
+                <a:latin typeface="メイリオ"/>
+                <a:ea typeface="メイリオ"/>
+                <a:cs typeface="メイリオ"/>
+              </a:rPr>
+              <a:t>美容室</a:t>
+            </a:r>
+          </a:p>
+          <a:p>
+            <a:pPr algn="ctr">
+              <a:lnSpc>
+                <a:spcPct val="110000"/>
+              </a:lnSpc>
+              <a:spcAft>
+                <a:spcPts val="600"/>
+              </a:spcAft>
+            </a:pPr>
+            <a:r>
+              <a:rPr sz="1050" b="0">
+                <a:solidFill>
+                  <a:srgbClr val="7F7F7F"/>
+                </a:solidFill>
+                <a:latin typeface="メイリオ"/>
+                <a:ea typeface="メイリオ"/>
+                <a:cs typeface="メイリオ"/>
+              </a:rPr>
+              <a:t>予約後のフォロー</a:t>
+            </a:r>
+          </a:p>
+          <a:p>
+            <a:pPr algn="ctr">
+              <a:lnSpc>
+                <a:spcPct val="110000"/>
+              </a:lnSpc>
+              <a:spcAft>
+                <a:spcPts val="0"/>
+              </a:spcAft>
+            </a:pPr>
+            <a:r>
+              <a:rPr sz="1150" b="0">
+                <a:solidFill>
+                  <a:srgbClr val="333333"/>
+                </a:solidFill>
+                <a:latin typeface="メイリオ"/>
+                <a:ea typeface="メイリオ"/>
+                <a:cs typeface="メイリオ"/>
+              </a:rPr>
+              <a:t>次回予約客数</a:t>
+            </a:r>
+          </a:p>
+          <a:p>
+            <a:pPr algn="ctr">
+              <a:lnSpc>
+                <a:spcPct val="110000"/>
+              </a:lnSpc>
+              <a:spcAft>
+                <a:spcPts val="0"/>
+              </a:spcAft>
+            </a:pPr>
+            <a:r>
+              <a:rPr sz="3400" b="1">
+                <a:solidFill>
+                  <a:srgbClr val="1F285A"/>
+                </a:solidFill>
+                <a:latin typeface="メイリオ"/>
+                <a:ea typeface="メイリオ"/>
+                <a:cs typeface="メイリオ"/>
+              </a:rPr>
+              <a:t>20%増</a:t>
+            </a:r>
+          </a:p>
+          <a:p>
+            <a:pPr algn="ctr">
+              <a:lnSpc>
+                <a:spcPct val="110000"/>
+              </a:lnSpc>
+              <a:spcAft>
+                <a:spcPts val="0"/>
+              </a:spcAft>
+            </a:pPr>
+            <a:r>
+              <a:rPr sz="950" b="0">
+                <a:solidFill>
+                  <a:srgbClr val="7F7F7F"/>
+                </a:solidFill>
+                <a:latin typeface="メイリオ"/>
+                <a:ea typeface="メイリオ"/>
+                <a:cs typeface="メイリオ"/>
+              </a:rPr>
+              <a:t>約200名 → 約240名</a:t>
             </a:r>
           </a:p>
         </p:txBody>
       </p:sp>
       <p:cxnSp>
         <p:nvCxnSpPr>
-          <p:cNvPr id="18" name="Connector 17"/>
+          <p:cNvPr id="25" name="Connector 24"/>
           <p:cNvCxnSpPr/>
           <p:nvPr/>
         </p:nvCxnSpPr>
         <p:spPr>
           <a:xfrm>
-            <a:off x="972000" y="3977999"/>
-            <a:ext cx="10320119" cy="0"/>
+            <a:off x="4328000" y="4284000"/>
+            <a:ext cx="0" cy="1584000"/>
           </a:xfrm>
           <a:prstGeom prst="line">
             <a:avLst/>
           </a:prstGeom>
-          <a:ln w="19050">
+          <a:ln w="9525">
             <a:solidFill>
-              <a:srgbClr val="1F285A"/>
+              <a:srgbClr val="D9D9D9"/>
             </a:solidFill>
-            <a:tailEnd type="triangle" w="med" len="med"/>
           </a:ln>
         </p:spPr>
         <p:style>
@@ -7989,737 +7681,14 @@
       </p:cxnSp>
       <p:sp>
         <p:nvSpPr>
-          <p:cNvPr id="19" name="TextBox 18"/>
+          <p:cNvPr id="26" name="TextBox 25"/>
           <p:cNvSpPr txBox="1"/>
           <p:nvPr/>
         </p:nvSpPr>
         <p:spPr>
           <a:xfrm>
-            <a:off x="792000" y="4014000"/>
-            <a:ext cx="3600000" cy="288000"/>
-          </a:xfrm>
-          <a:prstGeom prst="rect">
-            <a:avLst/>
-          </a:prstGeom>
-          <a:noFill/>
-        </p:spPr>
-        <p:txBody>
-          <a:bodyPr wrap="square" anchor="ctr" lIns="36000" rIns="36000" tIns="18000" bIns="18000">
-            <a:spAutoFit/>
-          </a:bodyPr>
-          <a:lstStyle/>
-          <a:p>
-            <a:pPr algn="l">
-              <a:lnSpc>
-                <a:spcPct val="110000"/>
-              </a:lnSpc>
-              <a:spcAft>
-                <a:spcPts val="0"/>
-              </a:spcAft>
-            </a:pPr>
-            <a:r>
-              <a:rPr sz="1300" b="1">
-                <a:solidFill>
-                  <a:srgbClr val="1F285A"/>
-                </a:solidFill>
-                <a:latin typeface="メイリオ"/>
-                <a:ea typeface="メイリオ"/>
-                <a:cs typeface="メイリオ"/>
-              </a:rPr>
-              <a:t>施策の例</a:t>
-            </a:r>
-          </a:p>
-        </p:txBody>
-      </p:sp>
-      <p:sp>
-        <p:nvSpPr>
-          <p:cNvPr id="20" name="Rounded Rectangle 19"/>
-          <p:cNvSpPr/>
-          <p:nvPr/>
-        </p:nvSpPr>
-        <p:spPr>
-          <a:xfrm>
-            <a:off x="792000" y="4338000"/>
-            <a:ext cx="1678019" cy="342000"/>
-          </a:xfrm>
-          <a:prstGeom prst="roundRect">
-            <a:avLst>
-              <a:gd name="adj" fmla="val 50000"/>
-            </a:avLst>
-          </a:prstGeom>
-          <a:solidFill>
-            <a:srgbClr val="F4F7FF"/>
-          </a:solidFill>
-          <a:ln>
-            <a:noFill/>
-          </a:ln>
-          <a:effectLst/>
-        </p:spPr>
-        <p:style>
-          <a:lnRef idx="1">
-            <a:schemeClr val="accent1"/>
-          </a:lnRef>
-          <a:fillRef idx="3">
-            <a:schemeClr val="accent1"/>
-          </a:fillRef>
-          <a:effectRef idx="0">
-            <a:schemeClr val="accent1"/>
-          </a:effectRef>
-          <a:fontRef idx="minor">
-            <a:schemeClr val="lt1"/>
-          </a:fontRef>
-        </p:style>
-        <p:txBody>
-          <a:bodyPr rtlCol="0" anchor="ctr" wrap="square" lIns="54000" tIns="0" rIns="54000" bIns="0"/>
-          <a:lstStyle/>
-          <a:p>
-            <a:pPr algn="ctr">
-              <a:lnSpc>
-                <a:spcPct val="110000"/>
-              </a:lnSpc>
-              <a:spcAft>
-                <a:spcPts val="0"/>
-              </a:spcAft>
-            </a:pPr>
-            <a:r>
-              <a:rPr sz="1100" b="1">
-                <a:solidFill>
-                  <a:srgbClr val="1F285A"/>
-                </a:solidFill>
-                <a:latin typeface="メイリオ"/>
-                <a:ea typeface="メイリオ"/>
-                <a:cs typeface="メイリオ"/>
-              </a:rPr>
-              <a:t>来店後フォロー</a:t>
-            </a:r>
-          </a:p>
-        </p:txBody>
-      </p:sp>
-      <p:sp>
-        <p:nvSpPr>
-          <p:cNvPr id="21" name="Rounded Rectangle 20"/>
-          <p:cNvSpPr/>
-          <p:nvPr/>
-        </p:nvSpPr>
-        <p:spPr>
-          <a:xfrm>
-            <a:off x="2578019" y="4338000"/>
-            <a:ext cx="1678019" cy="342000"/>
-          </a:xfrm>
-          <a:prstGeom prst="roundRect">
-            <a:avLst>
-              <a:gd name="adj" fmla="val 50000"/>
-            </a:avLst>
-          </a:prstGeom>
-          <a:solidFill>
-            <a:srgbClr val="F4F7FF"/>
-          </a:solidFill>
-          <a:ln>
-            <a:noFill/>
-          </a:ln>
-          <a:effectLst/>
-        </p:spPr>
-        <p:style>
-          <a:lnRef idx="1">
-            <a:schemeClr val="accent1"/>
-          </a:lnRef>
-          <a:fillRef idx="3">
-            <a:schemeClr val="accent1"/>
-          </a:fillRef>
-          <a:effectRef idx="0">
-            <a:schemeClr val="accent1"/>
-          </a:effectRef>
-          <a:fontRef idx="minor">
-            <a:schemeClr val="lt1"/>
-          </a:fontRef>
-        </p:style>
-        <p:txBody>
-          <a:bodyPr rtlCol="0" anchor="ctr" wrap="square" lIns="54000" tIns="0" rIns="54000" bIns="0"/>
-          <a:lstStyle/>
-          <a:p>
-            <a:pPr algn="ctr">
-              <a:lnSpc>
-                <a:spcPct val="110000"/>
-              </a:lnSpc>
-              <a:spcAft>
-                <a:spcPts val="0"/>
-              </a:spcAft>
-            </a:pPr>
-            <a:r>
-              <a:rPr sz="1100" b="1">
-                <a:solidFill>
-                  <a:srgbClr val="1F285A"/>
-                </a:solidFill>
-                <a:latin typeface="メイリオ"/>
-                <a:ea typeface="メイリオ"/>
-                <a:cs typeface="メイリオ"/>
-              </a:rPr>
-              <a:t>再来店促進</a:t>
-            </a:r>
-          </a:p>
-        </p:txBody>
-      </p:sp>
-      <p:sp>
-        <p:nvSpPr>
-          <p:cNvPr id="22" name="Rounded Rectangle 21"/>
-          <p:cNvSpPr/>
-          <p:nvPr/>
-        </p:nvSpPr>
-        <p:spPr>
-          <a:xfrm>
-            <a:off x="4364039" y="4338000"/>
-            <a:ext cx="1678019" cy="342000"/>
-          </a:xfrm>
-          <a:prstGeom prst="roundRect">
-            <a:avLst>
-              <a:gd name="adj" fmla="val 50000"/>
-            </a:avLst>
-          </a:prstGeom>
-          <a:solidFill>
-            <a:srgbClr val="F4F7FF"/>
-          </a:solidFill>
-          <a:ln>
-            <a:noFill/>
-          </a:ln>
-          <a:effectLst/>
-        </p:spPr>
-        <p:style>
-          <a:lnRef idx="1">
-            <a:schemeClr val="accent1"/>
-          </a:lnRef>
-          <a:fillRef idx="3">
-            <a:schemeClr val="accent1"/>
-          </a:fillRef>
-          <a:effectRef idx="0">
-            <a:schemeClr val="accent1"/>
-          </a:effectRef>
-          <a:fontRef idx="minor">
-            <a:schemeClr val="lt1"/>
-          </a:fontRef>
-        </p:style>
-        <p:txBody>
-          <a:bodyPr rtlCol="0" anchor="ctr" wrap="square" lIns="54000" tIns="0" rIns="54000" bIns="0"/>
-          <a:lstStyle/>
-          <a:p>
-            <a:pPr algn="ctr">
-              <a:lnSpc>
-                <a:spcPct val="110000"/>
-              </a:lnSpc>
-              <a:spcAft>
-                <a:spcPts val="0"/>
-              </a:spcAft>
-            </a:pPr>
-            <a:r>
-              <a:rPr sz="1100" b="1">
-                <a:solidFill>
-                  <a:srgbClr val="1F285A"/>
-                </a:solidFill>
-                <a:latin typeface="メイリオ"/>
-                <a:ea typeface="メイリオ"/>
-                <a:cs typeface="メイリオ"/>
-              </a:rPr>
-              <a:t>再購入促進</a:t>
-            </a:r>
-          </a:p>
-        </p:txBody>
-      </p:sp>
-      <p:sp>
-        <p:nvSpPr>
-          <p:cNvPr id="23" name="Rounded Rectangle 22"/>
-          <p:cNvSpPr/>
-          <p:nvPr/>
-        </p:nvSpPr>
-        <p:spPr>
-          <a:xfrm>
-            <a:off x="6150059" y="4338000"/>
-            <a:ext cx="1678019" cy="342000"/>
-          </a:xfrm>
-          <a:prstGeom prst="roundRect">
-            <a:avLst>
-              <a:gd name="adj" fmla="val 50000"/>
-            </a:avLst>
-          </a:prstGeom>
-          <a:solidFill>
-            <a:srgbClr val="F4F7FF"/>
-          </a:solidFill>
-          <a:ln>
-            <a:noFill/>
-          </a:ln>
-          <a:effectLst/>
-        </p:spPr>
-        <p:style>
-          <a:lnRef idx="1">
-            <a:schemeClr val="accent1"/>
-          </a:lnRef>
-          <a:fillRef idx="3">
-            <a:schemeClr val="accent1"/>
-          </a:fillRef>
-          <a:effectRef idx="0">
-            <a:schemeClr val="accent1"/>
-          </a:effectRef>
-          <a:fontRef idx="minor">
-            <a:schemeClr val="lt1"/>
-          </a:fontRef>
-        </p:style>
-        <p:txBody>
-          <a:bodyPr rtlCol="0" anchor="ctr" wrap="square" lIns="54000" tIns="0" rIns="54000" bIns="0"/>
-          <a:lstStyle/>
-          <a:p>
-            <a:pPr algn="ctr">
-              <a:lnSpc>
-                <a:spcPct val="110000"/>
-              </a:lnSpc>
-              <a:spcAft>
-                <a:spcPts val="0"/>
-              </a:spcAft>
-            </a:pPr>
-            <a:r>
-              <a:rPr sz="1100" b="1">
-                <a:solidFill>
-                  <a:srgbClr val="1F285A"/>
-                </a:solidFill>
-                <a:latin typeface="メイリオ"/>
-                <a:ea typeface="メイリオ"/>
-                <a:cs typeface="メイリオ"/>
-              </a:rPr>
-              <a:t>関連サービス案内</a:t>
-            </a:r>
-          </a:p>
-        </p:txBody>
-      </p:sp>
-      <p:sp>
-        <p:nvSpPr>
-          <p:cNvPr id="24" name="Rounded Rectangle 23"/>
-          <p:cNvSpPr/>
-          <p:nvPr/>
-        </p:nvSpPr>
-        <p:spPr>
-          <a:xfrm>
-            <a:off x="7936079" y="4338000"/>
-            <a:ext cx="1678019" cy="342000"/>
-          </a:xfrm>
-          <a:prstGeom prst="roundRect">
-            <a:avLst>
-              <a:gd name="adj" fmla="val 50000"/>
-            </a:avLst>
-          </a:prstGeom>
-          <a:solidFill>
-            <a:srgbClr val="F4F7FF"/>
-          </a:solidFill>
-          <a:ln>
-            <a:noFill/>
-          </a:ln>
-          <a:effectLst/>
-        </p:spPr>
-        <p:style>
-          <a:lnRef idx="1">
-            <a:schemeClr val="accent1"/>
-          </a:lnRef>
-          <a:fillRef idx="3">
-            <a:schemeClr val="accent1"/>
-          </a:fillRef>
-          <a:effectRef idx="0">
-            <a:schemeClr val="accent1"/>
-          </a:effectRef>
-          <a:fontRef idx="minor">
-            <a:schemeClr val="lt1"/>
-          </a:fontRef>
-        </p:style>
-        <p:txBody>
-          <a:bodyPr rtlCol="0" anchor="ctr" wrap="square" lIns="54000" tIns="0" rIns="54000" bIns="0"/>
-          <a:lstStyle/>
-          <a:p>
-            <a:pPr algn="ctr">
-              <a:lnSpc>
-                <a:spcPct val="110000"/>
-              </a:lnSpc>
-              <a:spcAft>
-                <a:spcPts val="0"/>
-              </a:spcAft>
-            </a:pPr>
-            <a:r>
-              <a:rPr sz="1100" b="1">
-                <a:solidFill>
-                  <a:srgbClr val="1F285A"/>
-                </a:solidFill>
-                <a:latin typeface="メイリオ"/>
-                <a:ea typeface="メイリオ"/>
-                <a:cs typeface="メイリオ"/>
-              </a:rPr>
-              <a:t>クーポン配信</a:t>
-            </a:r>
-          </a:p>
-        </p:txBody>
-      </p:sp>
-      <p:sp>
-        <p:nvSpPr>
-          <p:cNvPr id="25" name="Rounded Rectangle 24"/>
-          <p:cNvSpPr/>
-          <p:nvPr/>
-        </p:nvSpPr>
-        <p:spPr>
-          <a:xfrm>
-            <a:off x="9722099" y="4338000"/>
-            <a:ext cx="1678019" cy="342000"/>
-          </a:xfrm>
-          <a:prstGeom prst="roundRect">
-            <a:avLst>
-              <a:gd name="adj" fmla="val 50000"/>
-            </a:avLst>
-          </a:prstGeom>
-          <a:solidFill>
-            <a:srgbClr val="F4F7FF"/>
-          </a:solidFill>
-          <a:ln>
-            <a:noFill/>
-          </a:ln>
-          <a:effectLst/>
-        </p:spPr>
-        <p:style>
-          <a:lnRef idx="1">
-            <a:schemeClr val="accent1"/>
-          </a:lnRef>
-          <a:fillRef idx="3">
-            <a:schemeClr val="accent1"/>
-          </a:fillRef>
-          <a:effectRef idx="0">
-            <a:schemeClr val="accent1"/>
-          </a:effectRef>
-          <a:fontRef idx="minor">
-            <a:schemeClr val="lt1"/>
-          </a:fontRef>
-        </p:style>
-        <p:txBody>
-          <a:bodyPr rtlCol="0" anchor="ctr" wrap="square" lIns="54000" tIns="0" rIns="54000" bIns="0"/>
-          <a:lstStyle/>
-          <a:p>
-            <a:pPr algn="ctr">
-              <a:lnSpc>
-                <a:spcPct val="110000"/>
-              </a:lnSpc>
-              <a:spcAft>
-                <a:spcPts val="0"/>
-              </a:spcAft>
-            </a:pPr>
-            <a:r>
-              <a:rPr sz="1100" b="1">
-                <a:solidFill>
-                  <a:srgbClr val="1F285A"/>
-                </a:solidFill>
-                <a:latin typeface="メイリオ"/>
-                <a:ea typeface="メイリオ"/>
-                <a:cs typeface="メイリオ"/>
-              </a:rPr>
-              <a:t>セグメント配信</a:t>
-            </a:r>
-          </a:p>
-        </p:txBody>
-      </p:sp>
-      <p:sp>
-        <p:nvSpPr>
-          <p:cNvPr id="26" name="Rectangle 25"/>
-          <p:cNvSpPr/>
-          <p:nvPr/>
-        </p:nvSpPr>
-        <p:spPr>
-          <a:xfrm>
-            <a:off x="792000" y="4932000"/>
-            <a:ext cx="3200039" cy="720000"/>
-          </a:xfrm>
-          <a:prstGeom prst="rect">
-            <a:avLst/>
-          </a:prstGeom>
-          <a:solidFill>
-            <a:srgbClr val="D9D9D9"/>
-          </a:solidFill>
-          <a:ln>
-            <a:noFill/>
-          </a:ln>
-          <a:effectLst/>
-        </p:spPr>
-        <p:style>
-          <a:lnRef idx="1">
-            <a:schemeClr val="accent1"/>
-          </a:lnRef>
-          <a:fillRef idx="3">
-            <a:schemeClr val="accent1"/>
-          </a:fillRef>
-          <a:effectRef idx="0">
-            <a:schemeClr val="accent1"/>
-          </a:effectRef>
-          <a:fontRef idx="minor">
-            <a:schemeClr val="lt1"/>
-          </a:fontRef>
-        </p:style>
-        <p:txBody>
-          <a:bodyPr rtlCol="0" anchor="ctr" wrap="square" lIns="72000" tIns="18000" rIns="72000" bIns="18000"/>
-          <a:lstStyle/>
-          <a:p>
-            <a:pPr algn="ctr">
-              <a:lnSpc>
-                <a:spcPct val="110000"/>
-              </a:lnSpc>
-              <a:spcAft>
-                <a:spcPts val="0"/>
-              </a:spcAft>
-            </a:pPr>
-            <a:r>
-              <a:rPr sz="1350" b="1">
-                <a:solidFill>
-                  <a:srgbClr val="333333"/>
-                </a:solidFill>
-                <a:latin typeface="メイリオ"/>
-                <a:ea typeface="メイリオ"/>
-                <a:cs typeface="メイリオ"/>
-              </a:rPr>
-              <a:t>広告でCVを増やす</a:t>
-            </a:r>
-          </a:p>
-        </p:txBody>
-      </p:sp>
-      <p:sp>
-        <p:nvSpPr>
-          <p:cNvPr id="27" name="TextBox 26"/>
-          <p:cNvSpPr txBox="1"/>
-          <p:nvPr/>
-        </p:nvSpPr>
-        <p:spPr>
-          <a:xfrm>
-            <a:off x="3992039" y="4932000"/>
-            <a:ext cx="503999" cy="720000"/>
-          </a:xfrm>
-          <a:prstGeom prst="rect">
-            <a:avLst/>
-          </a:prstGeom>
-          <a:noFill/>
-        </p:spPr>
-        <p:txBody>
-          <a:bodyPr wrap="square" anchor="ctr" lIns="36000" rIns="36000" tIns="18000" bIns="18000">
-            <a:spAutoFit/>
-          </a:bodyPr>
-          <a:lstStyle/>
-          <a:p>
-            <a:pPr algn="ctr">
-              <a:lnSpc>
-                <a:spcPct val="110000"/>
-              </a:lnSpc>
-              <a:spcAft>
-                <a:spcPts val="0"/>
-              </a:spcAft>
-            </a:pPr>
-            <a:r>
-              <a:rPr sz="2400" b="1">
-                <a:solidFill>
-                  <a:srgbClr val="1F285A"/>
-                </a:solidFill>
-                <a:latin typeface="メイリオ"/>
-                <a:ea typeface="メイリオ"/>
-                <a:cs typeface="メイリオ"/>
-              </a:rPr>
-              <a:t>＋</a:t>
-            </a:r>
-          </a:p>
-        </p:txBody>
-      </p:sp>
-      <p:sp>
-        <p:nvSpPr>
-          <p:cNvPr id="28" name="Rectangle 27"/>
-          <p:cNvSpPr/>
-          <p:nvPr/>
-        </p:nvSpPr>
-        <p:spPr>
-          <a:xfrm>
-            <a:off x="4496039" y="4932000"/>
-            <a:ext cx="3200039" cy="720000"/>
-          </a:xfrm>
-          <a:prstGeom prst="rect">
-            <a:avLst/>
-          </a:prstGeom>
-          <a:solidFill>
-            <a:srgbClr val="E4E8F6"/>
-          </a:solidFill>
-          <a:ln>
-            <a:noFill/>
-          </a:ln>
-          <a:effectLst/>
-        </p:spPr>
-        <p:style>
-          <a:lnRef idx="1">
-            <a:schemeClr val="accent1"/>
-          </a:lnRef>
-          <a:fillRef idx="3">
-            <a:schemeClr val="accent1"/>
-          </a:fillRef>
-          <a:effectRef idx="0">
-            <a:schemeClr val="accent1"/>
-          </a:effectRef>
-          <a:fontRef idx="minor">
-            <a:schemeClr val="lt1"/>
-          </a:fontRef>
-        </p:style>
-        <p:txBody>
-          <a:bodyPr rtlCol="0" anchor="ctr" wrap="square" lIns="72000" tIns="18000" rIns="72000" bIns="18000"/>
-          <a:lstStyle/>
-          <a:p>
-            <a:pPr algn="ctr">
-              <a:lnSpc>
-                <a:spcPct val="110000"/>
-              </a:lnSpc>
-              <a:spcAft>
-                <a:spcPts val="0"/>
-              </a:spcAft>
-            </a:pPr>
-            <a:r>
-              <a:rPr sz="1350" b="1">
-                <a:solidFill>
-                  <a:srgbClr val="1F285A"/>
-                </a:solidFill>
-                <a:latin typeface="メイリオ"/>
-                <a:ea typeface="メイリオ"/>
-                <a:cs typeface="メイリオ"/>
-              </a:rPr>
-              <a:t>サンクスLINEで</a:t>
-            </a:r>
-          </a:p>
-          <a:p>
-            <a:pPr algn="ctr">
-              <a:lnSpc>
-                <a:spcPct val="110000"/>
-              </a:lnSpc>
-              <a:spcAft>
-                <a:spcPts val="0"/>
-              </a:spcAft>
-            </a:pPr>
-            <a:r>
-              <a:rPr sz="1350" b="1">
-                <a:solidFill>
-                  <a:srgbClr val="1F285A"/>
-                </a:solidFill>
-                <a:latin typeface="メイリオ"/>
-                <a:ea typeface="メイリオ"/>
-                <a:cs typeface="メイリオ"/>
-              </a:rPr>
-              <a:t>売上化と継続接点を高める</a:t>
-            </a:r>
-          </a:p>
-        </p:txBody>
-      </p:sp>
-      <p:sp>
-        <p:nvSpPr>
-          <p:cNvPr id="29" name="TextBox 28"/>
-          <p:cNvSpPr txBox="1"/>
-          <p:nvPr/>
-        </p:nvSpPr>
-        <p:spPr>
-          <a:xfrm>
-            <a:off x="7696079" y="4932000"/>
-            <a:ext cx="503999" cy="720000"/>
-          </a:xfrm>
-          <a:prstGeom prst="rect">
-            <a:avLst/>
-          </a:prstGeom>
-          <a:noFill/>
-        </p:spPr>
-        <p:txBody>
-          <a:bodyPr wrap="square" anchor="ctr" lIns="36000" rIns="36000" tIns="18000" bIns="18000">
-            <a:spAutoFit/>
-          </a:bodyPr>
-          <a:lstStyle/>
-          <a:p>
-            <a:pPr algn="ctr">
-              <a:lnSpc>
-                <a:spcPct val="110000"/>
-              </a:lnSpc>
-              <a:spcAft>
-                <a:spcPts val="0"/>
-              </a:spcAft>
-            </a:pPr>
-            <a:r>
-              <a:rPr sz="2400" b="1">
-                <a:solidFill>
-                  <a:srgbClr val="1F285A"/>
-                </a:solidFill>
-                <a:latin typeface="メイリオ"/>
-                <a:ea typeface="メイリオ"/>
-                <a:cs typeface="メイリオ"/>
-              </a:rPr>
-              <a:t>＝</a:t>
-            </a:r>
-          </a:p>
-        </p:txBody>
-      </p:sp>
-      <p:sp>
-        <p:nvSpPr>
-          <p:cNvPr id="30" name="Rectangle 29"/>
-          <p:cNvSpPr/>
-          <p:nvPr/>
-        </p:nvSpPr>
-        <p:spPr>
-          <a:xfrm>
-            <a:off x="8200079" y="4932000"/>
-            <a:ext cx="3200039" cy="720000"/>
-          </a:xfrm>
-          <a:prstGeom prst="rect">
-            <a:avLst/>
-          </a:prstGeom>
-          <a:solidFill>
-            <a:srgbClr val="1F285A"/>
-          </a:solidFill>
-          <a:ln>
-            <a:noFill/>
-          </a:ln>
-          <a:effectLst/>
-        </p:spPr>
-        <p:style>
-          <a:lnRef idx="1">
-            <a:schemeClr val="accent1"/>
-          </a:lnRef>
-          <a:fillRef idx="3">
-            <a:schemeClr val="accent1"/>
-          </a:fillRef>
-          <a:effectRef idx="0">
-            <a:schemeClr val="accent1"/>
-          </a:effectRef>
-          <a:fontRef idx="minor">
-            <a:schemeClr val="lt1"/>
-          </a:fontRef>
-        </p:style>
-        <p:txBody>
-          <a:bodyPr rtlCol="0" anchor="ctr" wrap="square" lIns="72000" tIns="18000" rIns="72000" bIns="18000"/>
-          <a:lstStyle/>
-          <a:p>
-            <a:pPr algn="ctr">
-              <a:lnSpc>
-                <a:spcPct val="110000"/>
-              </a:lnSpc>
-              <a:spcAft>
-                <a:spcPts val="0"/>
-              </a:spcAft>
-            </a:pPr>
-            <a:r>
-              <a:rPr sz="1350" b="1">
-                <a:solidFill>
-                  <a:srgbClr val="FFFFFF"/>
-                </a:solidFill>
-                <a:latin typeface="メイリオ"/>
-                <a:ea typeface="メイリオ"/>
-                <a:cs typeface="メイリオ"/>
-              </a:rPr>
-              <a:t>実売上・LTV向上</a:t>
-            </a:r>
-          </a:p>
-        </p:txBody>
-      </p:sp>
-      <p:sp>
-        <p:nvSpPr>
-          <p:cNvPr id="31" name="TextBox 30"/>
-          <p:cNvSpPr txBox="1"/>
-          <p:nvPr/>
-        </p:nvSpPr>
-        <p:spPr>
-          <a:xfrm>
-            <a:off x="792000" y="6192000"/>
-            <a:ext cx="10608119" cy="216000"/>
+            <a:off x="4472000" y="4248000"/>
+            <a:ext cx="3248000" cy="1655999"/>
           </a:xfrm>
           <a:prstGeom prst="rect">
             <a:avLst/>
@@ -8732,6 +7701,297 @@
           </a:bodyPr>
           <a:lstStyle/>
           <a:p>
+            <a:pPr algn="ctr">
+              <a:lnSpc>
+                <a:spcPct val="110000"/>
+              </a:lnSpc>
+              <a:spcAft>
+                <a:spcPts val="200"/>
+              </a:spcAft>
+            </a:pPr>
+            <a:r>
+              <a:rPr sz="1400" b="1">
+                <a:solidFill>
+                  <a:srgbClr val="1F285A"/>
+                </a:solidFill>
+                <a:latin typeface="メイリオ"/>
+                <a:ea typeface="メイリオ"/>
+                <a:cs typeface="メイリオ"/>
+              </a:rPr>
+              <a:t>居酒屋</a:t>
+            </a:r>
+          </a:p>
+          <a:p>
+            <a:pPr algn="ctr">
+              <a:lnSpc>
+                <a:spcPct val="110000"/>
+              </a:lnSpc>
+              <a:spcAft>
+                <a:spcPts val="600"/>
+              </a:spcAft>
+            </a:pPr>
+            <a:r>
+              <a:rPr sz="1050" b="0">
+                <a:solidFill>
+                  <a:srgbClr val="7F7F7F"/>
+                </a:solidFill>
+                <a:latin typeface="メイリオ"/>
+                <a:ea typeface="メイリオ"/>
+                <a:cs typeface="メイリオ"/>
+              </a:rPr>
+              <a:t>来店翌日のアンケートと、再来店前のクーポン</a:t>
+            </a:r>
+          </a:p>
+          <a:p>
+            <a:pPr algn="ctr">
+              <a:lnSpc>
+                <a:spcPct val="110000"/>
+              </a:lnSpc>
+              <a:spcAft>
+                <a:spcPts val="0"/>
+              </a:spcAft>
+            </a:pPr>
+            <a:r>
+              <a:rPr sz="1150" b="0">
+                <a:solidFill>
+                  <a:srgbClr val="333333"/>
+                </a:solidFill>
+                <a:latin typeface="メイリオ"/>
+                <a:ea typeface="メイリオ"/>
+                <a:cs typeface="メイリオ"/>
+              </a:rPr>
+              <a:t>リピーターの売上割合</a:t>
+            </a:r>
+          </a:p>
+          <a:p>
+            <a:pPr algn="ctr">
+              <a:lnSpc>
+                <a:spcPct val="110000"/>
+              </a:lnSpc>
+              <a:spcAft>
+                <a:spcPts val="0"/>
+              </a:spcAft>
+            </a:pPr>
+            <a:r>
+              <a:rPr sz="2600" b="1">
+                <a:solidFill>
+                  <a:srgbClr val="1F285A"/>
+                </a:solidFill>
+                <a:latin typeface="メイリオ"/>
+                <a:ea typeface="メイリオ"/>
+                <a:cs typeface="メイリオ"/>
+              </a:rPr>
+              <a:t>7.6% → 12.9%</a:t>
+            </a:r>
+          </a:p>
+          <a:p>
+            <a:pPr algn="ctr">
+              <a:lnSpc>
+                <a:spcPct val="110000"/>
+              </a:lnSpc>
+              <a:spcAft>
+                <a:spcPts val="0"/>
+              </a:spcAft>
+            </a:pPr>
+            <a:r>
+              <a:rPr sz="950" b="0">
+                <a:solidFill>
+                  <a:srgbClr val="7F7F7F"/>
+                </a:solidFill>
+                <a:latin typeface="メイリオ"/>
+                <a:ea typeface="メイリオ"/>
+                <a:cs typeface="メイリオ"/>
+              </a:rPr>
+              <a:t>2025年1月と3月の比較</a:t>
+            </a:r>
+          </a:p>
+        </p:txBody>
+      </p:sp>
+      <p:cxnSp>
+        <p:nvCxnSpPr>
+          <p:cNvPr id="27" name="Connector 26"/>
+          <p:cNvCxnSpPr/>
+          <p:nvPr/>
+        </p:nvCxnSpPr>
+        <p:spPr>
+          <a:xfrm>
+            <a:off x="7864000" y="4284000"/>
+            <a:ext cx="0" cy="1584000"/>
+          </a:xfrm>
+          <a:prstGeom prst="line">
+            <a:avLst/>
+          </a:prstGeom>
+          <a:ln w="9525">
+            <a:solidFill>
+              <a:srgbClr val="D9D9D9"/>
+            </a:solidFill>
+          </a:ln>
+        </p:spPr>
+        <p:style>
+          <a:lnRef idx="2">
+            <a:schemeClr val="accent1"/>
+          </a:lnRef>
+          <a:fillRef idx="0">
+            <a:schemeClr val="accent1"/>
+          </a:fillRef>
+          <a:effectRef idx="0">
+            <a:schemeClr val="accent1"/>
+          </a:effectRef>
+          <a:fontRef idx="minor">
+            <a:schemeClr val="tx1"/>
+          </a:fontRef>
+        </p:style>
+      </p:cxnSp>
+      <p:sp>
+        <p:nvSpPr>
+          <p:cNvPr id="28" name="TextBox 27"/>
+          <p:cNvSpPr txBox="1"/>
+          <p:nvPr/>
+        </p:nvSpPr>
+        <p:spPr>
+          <a:xfrm>
+            <a:off x="8008000" y="4248000"/>
+            <a:ext cx="3248000" cy="1655999"/>
+          </a:xfrm>
+          <a:prstGeom prst="rect">
+            <a:avLst/>
+          </a:prstGeom>
+          <a:noFill/>
+        </p:spPr>
+        <p:txBody>
+          <a:bodyPr wrap="square" anchor="t" lIns="36000" rIns="36000" tIns="18000" bIns="18000">
+            <a:spAutoFit/>
+          </a:bodyPr>
+          <a:lstStyle/>
+          <a:p>
+            <a:pPr algn="ctr">
+              <a:lnSpc>
+                <a:spcPct val="110000"/>
+              </a:lnSpc>
+              <a:spcAft>
+                <a:spcPts val="200"/>
+              </a:spcAft>
+            </a:pPr>
+            <a:r>
+              <a:rPr sz="1400" b="1">
+                <a:solidFill>
+                  <a:srgbClr val="1F285A"/>
+                </a:solidFill>
+                <a:latin typeface="メイリオ"/>
+                <a:ea typeface="メイリオ"/>
+                <a:cs typeface="メイリオ"/>
+              </a:rPr>
+              <a:t>焼肉店</a:t>
+            </a:r>
+          </a:p>
+          <a:p>
+            <a:pPr algn="ctr">
+              <a:lnSpc>
+                <a:spcPct val="110000"/>
+              </a:lnSpc>
+              <a:spcAft>
+                <a:spcPts val="600"/>
+              </a:spcAft>
+            </a:pPr>
+            <a:r>
+              <a:rPr sz="1050" b="0">
+                <a:solidFill>
+                  <a:srgbClr val="7F7F7F"/>
+                </a:solidFill>
+                <a:latin typeface="メイリオ"/>
+                <a:ea typeface="メイリオ"/>
+                <a:cs typeface="メイリオ"/>
+              </a:rPr>
+              <a:t>来店翌日に、アンケートとクーポンを自動配信</a:t>
+            </a:r>
+          </a:p>
+          <a:p>
+            <a:pPr algn="ctr">
+              <a:lnSpc>
+                <a:spcPct val="110000"/>
+              </a:lnSpc>
+              <a:spcAft>
+                <a:spcPts val="0"/>
+              </a:spcAft>
+            </a:pPr>
+            <a:r>
+              <a:rPr sz="1150" b="0">
+                <a:solidFill>
+                  <a:srgbClr val="333333"/>
+                </a:solidFill>
+                <a:latin typeface="メイリオ"/>
+                <a:ea typeface="メイリオ"/>
+                <a:cs typeface="メイリオ"/>
+              </a:rPr>
+              <a:t>リピーター率</a:t>
+            </a:r>
+          </a:p>
+          <a:p>
+            <a:pPr algn="ctr">
+              <a:lnSpc>
+                <a:spcPct val="110000"/>
+              </a:lnSpc>
+              <a:spcAft>
+                <a:spcPts val="0"/>
+              </a:spcAft>
+            </a:pPr>
+            <a:r>
+              <a:rPr sz="2600" b="1">
+                <a:solidFill>
+                  <a:srgbClr val="1F285A"/>
+                </a:solidFill>
+                <a:latin typeface="メイリオ"/>
+                <a:ea typeface="メイリオ"/>
+                <a:cs typeface="メイリオ"/>
+              </a:rPr>
+              <a:t>19.4% → 40%超</a:t>
+            </a:r>
+          </a:p>
+          <a:p>
+            <a:pPr algn="ctr">
+              <a:lnSpc>
+                <a:spcPct val="110000"/>
+              </a:lnSpc>
+              <a:spcAft>
+                <a:spcPts val="0"/>
+              </a:spcAft>
+            </a:pPr>
+            <a:r>
+              <a:rPr sz="950" b="0">
+                <a:solidFill>
+                  <a:srgbClr val="7F7F7F"/>
+                </a:solidFill>
+                <a:latin typeface="メイリオ"/>
+                <a:ea typeface="メイリオ"/>
+                <a:cs typeface="メイリオ"/>
+              </a:rPr>
+              <a:t>2024年1月と2025年1月の比較</a:t>
+            </a:r>
+          </a:p>
+        </p:txBody>
+      </p:sp>
+      <p:sp>
+        <p:nvSpPr>
+          <p:cNvPr id="29" name="TextBox 28"/>
+          <p:cNvSpPr txBox="1"/>
+          <p:nvPr/>
+        </p:nvSpPr>
+        <p:spPr>
+          <a:xfrm>
+            <a:off x="792000" y="6192000"/>
+            <a:ext cx="10608000" cy="216000"/>
+          </a:xfrm>
+          <a:prstGeom prst="rect">
+            <a:avLst/>
+          </a:prstGeom>
+          <a:noFill/>
+        </p:spPr>
+        <p:txBody>
+          <a:bodyPr wrap="square" anchor="t" lIns="36000" rIns="36000" tIns="18000" bIns="18000">
+            <a:spAutoFit/>
+          </a:bodyPr>
+          <a:lstStyle/>
+          <a:p>
             <a:pPr algn="l">
               <a:lnSpc>
                 <a:spcPct val="110000"/>
@@ -8749,7 +8009,7 @@
                 <a:ea typeface="メイリオ"/>
                 <a:cs typeface="メイリオ"/>
               </a:rPr>
-              <a:t>※100CV → 30友だち化（想定）の30人は、初回売上だけでなく継続フォローの対象になる</a:t>
+              <a:t>※サンクスLINE単体の効果ではなく、LINEでつながった後の施策の例（美容室・居酒屋・焼肉店はLINEミニアプリを併用）</a:t>
             </a:r>
           </a:p>
         </p:txBody>
